--- a/public/fun/pack/pptx/birthday/돌잔치_16_성장기록중심_평상수박.pptx
+++ b/public/fun/pack/pptx/birthday/돌잔치_16_성장기록중심_평상수박.pptx
@@ -3347,7 +3347,7 @@
             <a:r>
               <a:rPr sz="4000" b="1" i="0">
                 <a:solidFill>
-                  <a:srgbClr val="153C26"/>
+                  <a:srgbClr val="115F59"/>
                 </a:solidFill>
               </a:rPr>
               <a:t>첫 번째 생일</a:t>
@@ -3385,7 +3385,7 @@
             <a:r>
               <a:rPr sz="1700" b="0" i="1">
                 <a:solidFill>
-                  <a:srgbClr val="153C26"/>
+                  <a:srgbClr val="115F59"/>
                 </a:solidFill>
               </a:rPr>
               <a:t>처음 이가 나던 날을 기억합니다</a:t>
@@ -3460,7 +3460,7 @@
     <p:bg>
       <p:bgPr>
         <a:solidFill>
-          <a:srgbClr val="F0FAF4"/>
+          <a:srgbClr val="EEFCFB"/>
         </a:solidFill>
         <a:effectLst/>
       </p:bgPr>
@@ -3489,7 +3489,7 @@
           <a:noFill/>
           <a:ln w="28575">
             <a:solidFill>
-              <a:srgbClr val="308854"/>
+              <a:srgbClr val="26C5B8"/>
             </a:solidFill>
           </a:ln>
         </p:spPr>
@@ -3518,7 +3518,7 @@
           <a:noFill/>
           <a:ln w="9525">
             <a:solidFill>
-              <a:srgbClr val="D0F1DE"/>
+              <a:srgbClr val="D1FAF7"/>
             </a:solidFill>
           </a:ln>
         </p:spPr>
@@ -3560,7 +3560,7 @@
             <a:r>
               <a:rPr sz="3000" b="1" i="0">
                 <a:solidFill>
-                  <a:srgbClr val="153C26"/>
+                  <a:srgbClr val="115F59"/>
                 </a:solidFill>
               </a:rPr>
               <a:t>우리 아기를 소개합니다</a:t>
@@ -3585,11 +3585,11 @@
             </a:avLst>
           </a:prstGeom>
           <a:solidFill>
-            <a:srgbClr val="D0F1DE"/>
+            <a:srgbClr val="D1FAF7"/>
           </a:solidFill>
           <a:ln w="19050">
             <a:solidFill>
-              <a:srgbClr val="308854"/>
+              <a:srgbClr val="26C5B8"/>
             </a:solidFill>
             <a:prstDash val="dash"/>
           </a:ln>
@@ -3608,7 +3608,7 @@
             <a:r>
               <a:rPr sz="1400" b="0" i="0">
                 <a:solidFill>
-                  <a:srgbClr val="153C26"/>
+                  <a:srgbClr val="115F59"/>
                 </a:solidFill>
               </a:rPr>
               <a:t>아기 사진을 넣어 주세요</a:t>
@@ -3648,7 +3648,7 @@
                       <a:r>
                         <a:rPr sz="1500" b="1">
                           <a:solidFill>
-                            <a:srgbClr val="153C26"/>
+                            <a:srgbClr val="115F59"/>
                           </a:solidFill>
                         </a:rPr>
                         <a:t>이름</a:t>
@@ -3658,30 +3658,30 @@
                   <a:tcPr anchor="ctr" marL="73152" marR="73152">
                     <a:lnL w="9525" cap="flat" cmpd="sng" algn="ctr">
                       <a:solidFill>
-                        <a:srgbClr val="D0F1DE"/>
+                        <a:srgbClr val="D1FAF7"/>
                       </a:solidFill>
                       <a:prstDash val="solid"/>
                     </a:lnL>
                     <a:lnR w="9525" cap="flat" cmpd="sng" algn="ctr">
                       <a:solidFill>
-                        <a:srgbClr val="D0F1DE"/>
+                        <a:srgbClr val="D1FAF7"/>
                       </a:solidFill>
                       <a:prstDash val="solid"/>
                     </a:lnR>
                     <a:lnT w="9525" cap="flat" cmpd="sng" algn="ctr">
                       <a:solidFill>
-                        <a:srgbClr val="D0F1DE"/>
+                        <a:srgbClr val="D1FAF7"/>
                       </a:solidFill>
                       <a:prstDash val="solid"/>
                     </a:lnT>
                     <a:lnB w="9525" cap="flat" cmpd="sng" algn="ctr">
                       <a:solidFill>
-                        <a:srgbClr val="D0F1DE"/>
+                        <a:srgbClr val="D1FAF7"/>
                       </a:solidFill>
                       <a:prstDash val="solid"/>
                     </a:lnB>
                     <a:solidFill>
-                      <a:srgbClr val="D0F1DE"/>
+                      <a:srgbClr val="D1FAF7"/>
                     </a:solidFill>
                   </a:tcPr>
                 </a:tc>
@@ -3704,30 +3704,30 @@
                   <a:tcPr anchor="ctr" marL="73152" marR="73152">
                     <a:lnL w="9525" cap="flat" cmpd="sng" algn="ctr">
                       <a:solidFill>
-                        <a:srgbClr val="D0F1DE"/>
+                        <a:srgbClr val="D1FAF7"/>
                       </a:solidFill>
                       <a:prstDash val="solid"/>
                     </a:lnL>
                     <a:lnR w="9525" cap="flat" cmpd="sng" algn="ctr">
                       <a:solidFill>
-                        <a:srgbClr val="D0F1DE"/>
+                        <a:srgbClr val="D1FAF7"/>
                       </a:solidFill>
                       <a:prstDash val="solid"/>
                     </a:lnR>
                     <a:lnT w="9525" cap="flat" cmpd="sng" algn="ctr">
                       <a:solidFill>
-                        <a:srgbClr val="D0F1DE"/>
+                        <a:srgbClr val="D1FAF7"/>
                       </a:solidFill>
                       <a:prstDash val="solid"/>
                     </a:lnT>
                     <a:lnB w="9525" cap="flat" cmpd="sng" algn="ctr">
                       <a:solidFill>
-                        <a:srgbClr val="D0F1DE"/>
+                        <a:srgbClr val="D1FAF7"/>
                       </a:solidFill>
                       <a:prstDash val="solid"/>
                     </a:lnB>
                     <a:solidFill>
-                      <a:srgbClr val="F0FAF4"/>
+                      <a:srgbClr val="EEFCFB"/>
                     </a:solidFill>
                   </a:tcPr>
                 </a:tc>
@@ -3742,7 +3742,7 @@
                       <a:r>
                         <a:rPr sz="1500" b="1">
                           <a:solidFill>
-                            <a:srgbClr val="153C26"/>
+                            <a:srgbClr val="115F59"/>
                           </a:solidFill>
                         </a:rPr>
                         <a:t>생일</a:t>
@@ -3752,30 +3752,30 @@
                   <a:tcPr anchor="ctr" marL="73152" marR="73152">
                     <a:lnL w="9525" cap="flat" cmpd="sng" algn="ctr">
                       <a:solidFill>
-                        <a:srgbClr val="D0F1DE"/>
+                        <a:srgbClr val="D1FAF7"/>
                       </a:solidFill>
                       <a:prstDash val="solid"/>
                     </a:lnL>
                     <a:lnR w="9525" cap="flat" cmpd="sng" algn="ctr">
                       <a:solidFill>
-                        <a:srgbClr val="D0F1DE"/>
+                        <a:srgbClr val="D1FAF7"/>
                       </a:solidFill>
                       <a:prstDash val="solid"/>
                     </a:lnR>
                     <a:lnT w="9525" cap="flat" cmpd="sng" algn="ctr">
                       <a:solidFill>
-                        <a:srgbClr val="D0F1DE"/>
+                        <a:srgbClr val="D1FAF7"/>
                       </a:solidFill>
                       <a:prstDash val="solid"/>
                     </a:lnT>
                     <a:lnB w="9525" cap="flat" cmpd="sng" algn="ctr">
                       <a:solidFill>
-                        <a:srgbClr val="D0F1DE"/>
+                        <a:srgbClr val="D1FAF7"/>
                       </a:solidFill>
                       <a:prstDash val="solid"/>
                     </a:lnB>
                     <a:solidFill>
-                      <a:srgbClr val="D0F1DE"/>
+                      <a:srgbClr val="D1FAF7"/>
                     </a:solidFill>
                   </a:tcPr>
                 </a:tc>
@@ -3798,25 +3798,25 @@
                   <a:tcPr anchor="ctr" marL="73152" marR="73152">
                     <a:lnL w="9525" cap="flat" cmpd="sng" algn="ctr">
                       <a:solidFill>
-                        <a:srgbClr val="D0F1DE"/>
+                        <a:srgbClr val="D1FAF7"/>
                       </a:solidFill>
                       <a:prstDash val="solid"/>
                     </a:lnL>
                     <a:lnR w="9525" cap="flat" cmpd="sng" algn="ctr">
                       <a:solidFill>
-                        <a:srgbClr val="D0F1DE"/>
+                        <a:srgbClr val="D1FAF7"/>
                       </a:solidFill>
                       <a:prstDash val="solid"/>
                     </a:lnR>
                     <a:lnT w="9525" cap="flat" cmpd="sng" algn="ctr">
                       <a:solidFill>
-                        <a:srgbClr val="D0F1DE"/>
+                        <a:srgbClr val="D1FAF7"/>
                       </a:solidFill>
                       <a:prstDash val="solid"/>
                     </a:lnT>
                     <a:lnB w="9525" cap="flat" cmpd="sng" algn="ctr">
                       <a:solidFill>
-                        <a:srgbClr val="D0F1DE"/>
+                        <a:srgbClr val="D1FAF7"/>
                       </a:solidFill>
                       <a:prstDash val="solid"/>
                     </a:lnB>
@@ -3836,7 +3836,7 @@
                       <a:r>
                         <a:rPr sz="1500" b="1">
                           <a:solidFill>
-                            <a:srgbClr val="153C26"/>
+                            <a:srgbClr val="115F59"/>
                           </a:solidFill>
                         </a:rPr>
                         <a:t>키 · 몸무게</a:t>
@@ -3846,30 +3846,30 @@
                   <a:tcPr anchor="ctr" marL="73152" marR="73152">
                     <a:lnL w="9525" cap="flat" cmpd="sng" algn="ctr">
                       <a:solidFill>
-                        <a:srgbClr val="D0F1DE"/>
+                        <a:srgbClr val="D1FAF7"/>
                       </a:solidFill>
                       <a:prstDash val="solid"/>
                     </a:lnL>
                     <a:lnR w="9525" cap="flat" cmpd="sng" algn="ctr">
                       <a:solidFill>
-                        <a:srgbClr val="D0F1DE"/>
+                        <a:srgbClr val="D1FAF7"/>
                       </a:solidFill>
                       <a:prstDash val="solid"/>
                     </a:lnR>
                     <a:lnT w="9525" cap="flat" cmpd="sng" algn="ctr">
                       <a:solidFill>
-                        <a:srgbClr val="D0F1DE"/>
+                        <a:srgbClr val="D1FAF7"/>
                       </a:solidFill>
                       <a:prstDash val="solid"/>
                     </a:lnT>
                     <a:lnB w="9525" cap="flat" cmpd="sng" algn="ctr">
                       <a:solidFill>
-                        <a:srgbClr val="D0F1DE"/>
+                        <a:srgbClr val="D1FAF7"/>
                       </a:solidFill>
                       <a:prstDash val="solid"/>
                     </a:lnB>
                     <a:solidFill>
-                      <a:srgbClr val="D0F1DE"/>
+                      <a:srgbClr val="D1FAF7"/>
                     </a:solidFill>
                   </a:tcPr>
                 </a:tc>
@@ -3892,30 +3892,30 @@
                   <a:tcPr anchor="ctr" marL="73152" marR="73152">
                     <a:lnL w="9525" cap="flat" cmpd="sng" algn="ctr">
                       <a:solidFill>
-                        <a:srgbClr val="D0F1DE"/>
+                        <a:srgbClr val="D1FAF7"/>
                       </a:solidFill>
                       <a:prstDash val="solid"/>
                     </a:lnL>
                     <a:lnR w="9525" cap="flat" cmpd="sng" algn="ctr">
                       <a:solidFill>
-                        <a:srgbClr val="D0F1DE"/>
+                        <a:srgbClr val="D1FAF7"/>
                       </a:solidFill>
                       <a:prstDash val="solid"/>
                     </a:lnR>
                     <a:lnT w="9525" cap="flat" cmpd="sng" algn="ctr">
                       <a:solidFill>
-                        <a:srgbClr val="D0F1DE"/>
+                        <a:srgbClr val="D1FAF7"/>
                       </a:solidFill>
                       <a:prstDash val="solid"/>
                     </a:lnT>
                     <a:lnB w="9525" cap="flat" cmpd="sng" algn="ctr">
                       <a:solidFill>
-                        <a:srgbClr val="D0F1DE"/>
+                        <a:srgbClr val="D1FAF7"/>
                       </a:solidFill>
                       <a:prstDash val="solid"/>
                     </a:lnB>
                     <a:solidFill>
-                      <a:srgbClr val="F0FAF4"/>
+                      <a:srgbClr val="EEFCFB"/>
                     </a:solidFill>
                   </a:tcPr>
                 </a:tc>
@@ -3930,7 +3930,7 @@
                       <a:r>
                         <a:rPr sz="1500" b="1">
                           <a:solidFill>
-                            <a:srgbClr val="153C26"/>
+                            <a:srgbClr val="115F59"/>
                           </a:solidFill>
                         </a:rPr>
                         <a:t>좋아하는 것</a:t>
@@ -3940,30 +3940,30 @@
                   <a:tcPr anchor="ctr" marL="73152" marR="73152">
                     <a:lnL w="9525" cap="flat" cmpd="sng" algn="ctr">
                       <a:solidFill>
-                        <a:srgbClr val="D0F1DE"/>
+                        <a:srgbClr val="D1FAF7"/>
                       </a:solidFill>
                       <a:prstDash val="solid"/>
                     </a:lnL>
                     <a:lnR w="9525" cap="flat" cmpd="sng" algn="ctr">
                       <a:solidFill>
-                        <a:srgbClr val="D0F1DE"/>
+                        <a:srgbClr val="D1FAF7"/>
                       </a:solidFill>
                       <a:prstDash val="solid"/>
                     </a:lnR>
                     <a:lnT w="9525" cap="flat" cmpd="sng" algn="ctr">
                       <a:solidFill>
-                        <a:srgbClr val="D0F1DE"/>
+                        <a:srgbClr val="D1FAF7"/>
                       </a:solidFill>
                       <a:prstDash val="solid"/>
                     </a:lnT>
                     <a:lnB w="9525" cap="flat" cmpd="sng" algn="ctr">
                       <a:solidFill>
-                        <a:srgbClr val="D0F1DE"/>
+                        <a:srgbClr val="D1FAF7"/>
                       </a:solidFill>
                       <a:prstDash val="solid"/>
                     </a:lnB>
                     <a:solidFill>
-                      <a:srgbClr val="D0F1DE"/>
+                      <a:srgbClr val="D1FAF7"/>
                     </a:solidFill>
                   </a:tcPr>
                 </a:tc>
@@ -3986,25 +3986,25 @@
                   <a:tcPr anchor="ctr" marL="73152" marR="73152">
                     <a:lnL w="9525" cap="flat" cmpd="sng" algn="ctr">
                       <a:solidFill>
-                        <a:srgbClr val="D0F1DE"/>
+                        <a:srgbClr val="D1FAF7"/>
                       </a:solidFill>
                       <a:prstDash val="solid"/>
                     </a:lnL>
                     <a:lnR w="9525" cap="flat" cmpd="sng" algn="ctr">
                       <a:solidFill>
-                        <a:srgbClr val="D0F1DE"/>
+                        <a:srgbClr val="D1FAF7"/>
                       </a:solidFill>
                       <a:prstDash val="solid"/>
                     </a:lnR>
                     <a:lnT w="9525" cap="flat" cmpd="sng" algn="ctr">
                       <a:solidFill>
-                        <a:srgbClr val="D0F1DE"/>
+                        <a:srgbClr val="D1FAF7"/>
                       </a:solidFill>
                       <a:prstDash val="solid"/>
                     </a:lnT>
                     <a:lnB w="9525" cap="flat" cmpd="sng" algn="ctr">
                       <a:solidFill>
-                        <a:srgbClr val="D0F1DE"/>
+                        <a:srgbClr val="D1FAF7"/>
                       </a:solidFill>
                       <a:prstDash val="solid"/>
                     </a:lnB>
@@ -4024,7 +4024,7 @@
                       <a:r>
                         <a:rPr sz="1500" b="1">
                           <a:solidFill>
-                            <a:srgbClr val="153C26"/>
+                            <a:srgbClr val="115F59"/>
                           </a:solidFill>
                         </a:rPr>
                         <a:t>별명</a:t>
@@ -4034,30 +4034,30 @@
                   <a:tcPr anchor="ctr" marL="73152" marR="73152">
                     <a:lnL w="9525" cap="flat" cmpd="sng" algn="ctr">
                       <a:solidFill>
-                        <a:srgbClr val="D0F1DE"/>
+                        <a:srgbClr val="D1FAF7"/>
                       </a:solidFill>
                       <a:prstDash val="solid"/>
                     </a:lnL>
                     <a:lnR w="9525" cap="flat" cmpd="sng" algn="ctr">
                       <a:solidFill>
-                        <a:srgbClr val="D0F1DE"/>
+                        <a:srgbClr val="D1FAF7"/>
                       </a:solidFill>
                       <a:prstDash val="solid"/>
                     </a:lnR>
                     <a:lnT w="9525" cap="flat" cmpd="sng" algn="ctr">
                       <a:solidFill>
-                        <a:srgbClr val="D0F1DE"/>
+                        <a:srgbClr val="D1FAF7"/>
                       </a:solidFill>
                       <a:prstDash val="solid"/>
                     </a:lnT>
                     <a:lnB w="9525" cap="flat" cmpd="sng" algn="ctr">
                       <a:solidFill>
-                        <a:srgbClr val="D0F1DE"/>
+                        <a:srgbClr val="D1FAF7"/>
                       </a:solidFill>
                       <a:prstDash val="solid"/>
                     </a:lnB>
                     <a:solidFill>
-                      <a:srgbClr val="D0F1DE"/>
+                      <a:srgbClr val="D1FAF7"/>
                     </a:solidFill>
                   </a:tcPr>
                 </a:tc>
@@ -4080,30 +4080,30 @@
                   <a:tcPr anchor="ctr" marL="73152" marR="73152">
                     <a:lnL w="9525" cap="flat" cmpd="sng" algn="ctr">
                       <a:solidFill>
-                        <a:srgbClr val="D0F1DE"/>
+                        <a:srgbClr val="D1FAF7"/>
                       </a:solidFill>
                       <a:prstDash val="solid"/>
                     </a:lnL>
                     <a:lnR w="9525" cap="flat" cmpd="sng" algn="ctr">
                       <a:solidFill>
-                        <a:srgbClr val="D0F1DE"/>
+                        <a:srgbClr val="D1FAF7"/>
                       </a:solidFill>
                       <a:prstDash val="solid"/>
                     </a:lnR>
                     <a:lnT w="9525" cap="flat" cmpd="sng" algn="ctr">
                       <a:solidFill>
-                        <a:srgbClr val="D0F1DE"/>
+                        <a:srgbClr val="D1FAF7"/>
                       </a:solidFill>
                       <a:prstDash val="solid"/>
                     </a:lnT>
                     <a:lnB w="9525" cap="flat" cmpd="sng" algn="ctr">
                       <a:solidFill>
-                        <a:srgbClr val="D0F1DE"/>
+                        <a:srgbClr val="D1FAF7"/>
                       </a:solidFill>
                       <a:prstDash val="solid"/>
                     </a:lnB>
                     <a:solidFill>
-                      <a:srgbClr val="F0FAF4"/>
+                      <a:srgbClr val="EEFCFB"/>
                     </a:solidFill>
                   </a:tcPr>
                 </a:tc>
@@ -4118,7 +4118,7 @@
                       <a:r>
                         <a:rPr sz="1500" b="1">
                           <a:solidFill>
-                            <a:srgbClr val="153C26"/>
+                            <a:srgbClr val="115F59"/>
                           </a:solidFill>
                         </a:rPr>
                         <a:t>부모의 마음</a:t>
@@ -4128,30 +4128,30 @@
                   <a:tcPr anchor="ctr" marL="73152" marR="73152">
                     <a:lnL w="9525" cap="flat" cmpd="sng" algn="ctr">
                       <a:solidFill>
-                        <a:srgbClr val="D0F1DE"/>
+                        <a:srgbClr val="D1FAF7"/>
                       </a:solidFill>
                       <a:prstDash val="solid"/>
                     </a:lnL>
                     <a:lnR w="9525" cap="flat" cmpd="sng" algn="ctr">
                       <a:solidFill>
-                        <a:srgbClr val="D0F1DE"/>
+                        <a:srgbClr val="D1FAF7"/>
                       </a:solidFill>
                       <a:prstDash val="solid"/>
                     </a:lnR>
                     <a:lnT w="9525" cap="flat" cmpd="sng" algn="ctr">
                       <a:solidFill>
-                        <a:srgbClr val="D0F1DE"/>
+                        <a:srgbClr val="D1FAF7"/>
                       </a:solidFill>
                       <a:prstDash val="solid"/>
                     </a:lnT>
                     <a:lnB w="9525" cap="flat" cmpd="sng" algn="ctr">
                       <a:solidFill>
-                        <a:srgbClr val="D0F1DE"/>
+                        <a:srgbClr val="D1FAF7"/>
                       </a:solidFill>
                       <a:prstDash val="solid"/>
                     </a:lnB>
                     <a:solidFill>
-                      <a:srgbClr val="D0F1DE"/>
+                      <a:srgbClr val="D1FAF7"/>
                     </a:solidFill>
                   </a:tcPr>
                 </a:tc>
@@ -4174,25 +4174,25 @@
                   <a:tcPr anchor="ctr" marL="73152" marR="73152">
                     <a:lnL w="9525" cap="flat" cmpd="sng" algn="ctr">
                       <a:solidFill>
-                        <a:srgbClr val="D0F1DE"/>
+                        <a:srgbClr val="D1FAF7"/>
                       </a:solidFill>
                       <a:prstDash val="solid"/>
                     </a:lnL>
                     <a:lnR w="9525" cap="flat" cmpd="sng" algn="ctr">
                       <a:solidFill>
-                        <a:srgbClr val="D0F1DE"/>
+                        <a:srgbClr val="D1FAF7"/>
                       </a:solidFill>
                       <a:prstDash val="solid"/>
                     </a:lnR>
                     <a:lnT w="9525" cap="flat" cmpd="sng" algn="ctr">
                       <a:solidFill>
-                        <a:srgbClr val="D0F1DE"/>
+                        <a:srgbClr val="D1FAF7"/>
                       </a:solidFill>
                       <a:prstDash val="solid"/>
                     </a:lnT>
                     <a:lnB w="9525" cap="flat" cmpd="sng" algn="ctr">
                       <a:solidFill>
-                        <a:srgbClr val="D0F1DE"/>
+                        <a:srgbClr val="D1FAF7"/>
                       </a:solidFill>
                       <a:prstDash val="solid"/>
                     </a:lnB>
@@ -4220,7 +4220,7 @@
     <p:bg>
       <p:bgPr>
         <a:solidFill>
-          <a:srgbClr val="F0FAF4"/>
+          <a:srgbClr val="EEFCFB"/>
         </a:solidFill>
         <a:effectLst/>
       </p:bgPr>
@@ -4249,7 +4249,7 @@
           <a:noFill/>
           <a:ln w="28575">
             <a:solidFill>
-              <a:srgbClr val="308854"/>
+              <a:srgbClr val="26C5B8"/>
             </a:solidFill>
           </a:ln>
         </p:spPr>
@@ -4278,7 +4278,7 @@
           <a:noFill/>
           <a:ln w="9525">
             <a:solidFill>
-              <a:srgbClr val="D0F1DE"/>
+              <a:srgbClr val="D1FAF7"/>
             </a:solidFill>
           </a:ln>
         </p:spPr>
@@ -4320,7 +4320,7 @@
             <a:r>
               <a:rPr sz="3000" b="1" i="0">
                 <a:solidFill>
-                  <a:srgbClr val="153C26"/>
+                  <a:srgbClr val="115F59"/>
                 </a:solidFill>
               </a:rPr>
               <a:t>한 해 성장 기록</a:t>
@@ -4343,7 +4343,7 @@
             <a:avLst/>
           </a:prstGeom>
           <a:solidFill>
-            <a:srgbClr val="D0F1DE"/>
+            <a:srgbClr val="D1FAF7"/>
           </a:solidFill>
           <a:ln>
             <a:noFill/>
@@ -4372,7 +4372,7 @@
             <a:avLst/>
           </a:prstGeom>
           <a:solidFill>
-            <a:srgbClr val="308854"/>
+            <a:srgbClr val="26C5B8"/>
           </a:solidFill>
           <a:ln w="38100">
             <a:solidFill>
@@ -4418,7 +4418,7 @@
             <a:r>
               <a:rPr sz="1400" b="1" i="0">
                 <a:solidFill>
-                  <a:srgbClr val="308854"/>
+                  <a:srgbClr val="26C5B8"/>
                 </a:solidFill>
               </a:rPr>
               <a:t>1개월</a:t>
@@ -4456,7 +4456,7 @@
             <a:r>
               <a:rPr sz="1600" b="1" i="0">
                 <a:solidFill>
-                  <a:srgbClr val="153C26"/>
+                  <a:srgbClr val="115F59"/>
                 </a:solidFill>
               </a:rPr>
               <a:t>처음 눈을 맞춘 날</a:t>
@@ -4517,7 +4517,7 @@
             <a:avLst/>
           </a:prstGeom>
           <a:solidFill>
-            <a:srgbClr val="308854"/>
+            <a:srgbClr val="26C5B8"/>
           </a:solidFill>
           <a:ln w="38100">
             <a:solidFill>
@@ -4563,7 +4563,7 @@
             <a:r>
               <a:rPr sz="1400" b="1" i="0">
                 <a:solidFill>
-                  <a:srgbClr val="308854"/>
+                  <a:srgbClr val="26C5B8"/>
                 </a:solidFill>
               </a:rPr>
               <a:t>3개월</a:t>
@@ -4601,7 +4601,7 @@
             <a:r>
               <a:rPr sz="1600" b="1" i="0">
                 <a:solidFill>
-                  <a:srgbClr val="153C26"/>
+                  <a:srgbClr val="115F59"/>
                 </a:solidFill>
               </a:rPr>
               <a:t>처음 웃은 날</a:t>
@@ -4662,7 +4662,7 @@
             <a:avLst/>
           </a:prstGeom>
           <a:solidFill>
-            <a:srgbClr val="308854"/>
+            <a:srgbClr val="26C5B8"/>
           </a:solidFill>
           <a:ln w="38100">
             <a:solidFill>
@@ -4708,7 +4708,7 @@
             <a:r>
               <a:rPr sz="1400" b="1" i="0">
                 <a:solidFill>
-                  <a:srgbClr val="308854"/>
+                  <a:srgbClr val="26C5B8"/>
                 </a:solidFill>
               </a:rPr>
               <a:t>6개월</a:t>
@@ -4746,7 +4746,7 @@
             <a:r>
               <a:rPr sz="1600" b="1" i="0">
                 <a:solidFill>
-                  <a:srgbClr val="153C26"/>
+                  <a:srgbClr val="115F59"/>
                 </a:solidFill>
               </a:rPr>
               <a:t>뒤집기 성공</a:t>
@@ -4807,7 +4807,7 @@
             <a:avLst/>
           </a:prstGeom>
           <a:solidFill>
-            <a:srgbClr val="308854"/>
+            <a:srgbClr val="26C5B8"/>
           </a:solidFill>
           <a:ln w="38100">
             <a:solidFill>
@@ -4853,7 +4853,7 @@
             <a:r>
               <a:rPr sz="1400" b="1" i="0">
                 <a:solidFill>
-                  <a:srgbClr val="308854"/>
+                  <a:srgbClr val="26C5B8"/>
                 </a:solidFill>
               </a:rPr>
               <a:t>9개월</a:t>
@@ -4891,7 +4891,7 @@
             <a:r>
               <a:rPr sz="1600" b="1" i="0">
                 <a:solidFill>
-                  <a:srgbClr val="153C26"/>
+                  <a:srgbClr val="115F59"/>
                 </a:solidFill>
               </a:rPr>
               <a:t>첫 이유식</a:t>
@@ -4952,7 +4952,7 @@
             <a:avLst/>
           </a:prstGeom>
           <a:solidFill>
-            <a:srgbClr val="308854"/>
+            <a:srgbClr val="26C5B8"/>
           </a:solidFill>
           <a:ln w="38100">
             <a:solidFill>
@@ -4998,7 +4998,7 @@
             <a:r>
               <a:rPr sz="1400" b="1" i="0">
                 <a:solidFill>
-                  <a:srgbClr val="308854"/>
+                  <a:srgbClr val="26C5B8"/>
                 </a:solidFill>
               </a:rPr>
               <a:t>12개월</a:t>
@@ -5036,7 +5036,7 @@
             <a:r>
               <a:rPr sz="1600" b="1" i="0">
                 <a:solidFill>
-                  <a:srgbClr val="153C26"/>
+                  <a:srgbClr val="115F59"/>
                 </a:solidFill>
               </a:rPr>
               <a:t>첫 걸음</a:t>
@@ -5096,7 +5096,7 @@
     <p:bg>
       <p:bgPr>
         <a:solidFill>
-          <a:srgbClr val="F0FAF4"/>
+          <a:srgbClr val="EEFCFB"/>
         </a:solidFill>
         <a:effectLst/>
       </p:bgPr>
@@ -5125,7 +5125,7 @@
           <a:noFill/>
           <a:ln w="28575">
             <a:solidFill>
-              <a:srgbClr val="308854"/>
+              <a:srgbClr val="26C5B8"/>
             </a:solidFill>
           </a:ln>
         </p:spPr>
@@ -5154,7 +5154,7 @@
           <a:noFill/>
           <a:ln w="9525">
             <a:solidFill>
-              <a:srgbClr val="D0F1DE"/>
+              <a:srgbClr val="D1FAF7"/>
             </a:solidFill>
           </a:ln>
         </p:spPr>
@@ -5196,7 +5196,7 @@
             <a:r>
               <a:rPr sz="3000" b="1" i="0">
                 <a:solidFill>
-                  <a:srgbClr val="153C26"/>
+                  <a:srgbClr val="115F59"/>
                 </a:solidFill>
               </a:rPr>
               <a:t>키와 몸무게</a:t>
@@ -5249,30 +5249,30 @@
                   <a:tcPr anchor="ctr" marL="73152" marR="73152">
                     <a:lnL w="9525" cap="flat" cmpd="sng" algn="ctr">
                       <a:solidFill>
-                        <a:srgbClr val="308854"/>
+                        <a:srgbClr val="26C5B8"/>
                       </a:solidFill>
                       <a:prstDash val="solid"/>
                     </a:lnL>
                     <a:lnR w="9525" cap="flat" cmpd="sng" algn="ctr">
                       <a:solidFill>
-                        <a:srgbClr val="308854"/>
+                        <a:srgbClr val="26C5B8"/>
                       </a:solidFill>
                       <a:prstDash val="solid"/>
                     </a:lnR>
                     <a:lnT w="9525" cap="flat" cmpd="sng" algn="ctr">
                       <a:solidFill>
-                        <a:srgbClr val="308854"/>
+                        <a:srgbClr val="26C5B8"/>
                       </a:solidFill>
                       <a:prstDash val="solid"/>
                     </a:lnT>
                     <a:lnB w="9525" cap="flat" cmpd="sng" algn="ctr">
                       <a:solidFill>
-                        <a:srgbClr val="308854"/>
+                        <a:srgbClr val="26C5B8"/>
                       </a:solidFill>
                       <a:prstDash val="solid"/>
                     </a:lnB>
                     <a:solidFill>
-                      <a:srgbClr val="308854"/>
+                      <a:srgbClr val="26C5B8"/>
                     </a:solidFill>
                   </a:tcPr>
                 </a:tc>
@@ -5295,30 +5295,30 @@
                   <a:tcPr anchor="ctr" marL="73152" marR="73152">
                     <a:lnL w="9525" cap="flat" cmpd="sng" algn="ctr">
                       <a:solidFill>
-                        <a:srgbClr val="308854"/>
+                        <a:srgbClr val="26C5B8"/>
                       </a:solidFill>
                       <a:prstDash val="solid"/>
                     </a:lnL>
                     <a:lnR w="9525" cap="flat" cmpd="sng" algn="ctr">
                       <a:solidFill>
-                        <a:srgbClr val="308854"/>
+                        <a:srgbClr val="26C5B8"/>
                       </a:solidFill>
                       <a:prstDash val="solid"/>
                     </a:lnR>
                     <a:lnT w="9525" cap="flat" cmpd="sng" algn="ctr">
                       <a:solidFill>
-                        <a:srgbClr val="308854"/>
+                        <a:srgbClr val="26C5B8"/>
                       </a:solidFill>
                       <a:prstDash val="solid"/>
                     </a:lnT>
                     <a:lnB w="9525" cap="flat" cmpd="sng" algn="ctr">
                       <a:solidFill>
-                        <a:srgbClr val="308854"/>
+                        <a:srgbClr val="26C5B8"/>
                       </a:solidFill>
                       <a:prstDash val="solid"/>
                     </a:lnB>
                     <a:solidFill>
-                      <a:srgbClr val="308854"/>
+                      <a:srgbClr val="26C5B8"/>
                     </a:solidFill>
                   </a:tcPr>
                 </a:tc>
@@ -5341,30 +5341,30 @@
                   <a:tcPr anchor="ctr" marL="73152" marR="73152">
                     <a:lnL w="9525" cap="flat" cmpd="sng" algn="ctr">
                       <a:solidFill>
-                        <a:srgbClr val="308854"/>
+                        <a:srgbClr val="26C5B8"/>
                       </a:solidFill>
                       <a:prstDash val="solid"/>
                     </a:lnL>
                     <a:lnR w="9525" cap="flat" cmpd="sng" algn="ctr">
                       <a:solidFill>
-                        <a:srgbClr val="308854"/>
+                        <a:srgbClr val="26C5B8"/>
                       </a:solidFill>
                       <a:prstDash val="solid"/>
                     </a:lnR>
                     <a:lnT w="9525" cap="flat" cmpd="sng" algn="ctr">
                       <a:solidFill>
-                        <a:srgbClr val="308854"/>
+                        <a:srgbClr val="26C5B8"/>
                       </a:solidFill>
                       <a:prstDash val="solid"/>
                     </a:lnT>
                     <a:lnB w="9525" cap="flat" cmpd="sng" algn="ctr">
                       <a:solidFill>
-                        <a:srgbClr val="308854"/>
+                        <a:srgbClr val="26C5B8"/>
                       </a:solidFill>
                       <a:prstDash val="solid"/>
                     </a:lnB>
                     <a:solidFill>
-                      <a:srgbClr val="308854"/>
+                      <a:srgbClr val="26C5B8"/>
                     </a:solidFill>
                   </a:tcPr>
                 </a:tc>
@@ -5387,30 +5387,30 @@
                   <a:tcPr anchor="ctr" marL="73152" marR="73152">
                     <a:lnL w="9525" cap="flat" cmpd="sng" algn="ctr">
                       <a:solidFill>
-                        <a:srgbClr val="308854"/>
+                        <a:srgbClr val="26C5B8"/>
                       </a:solidFill>
                       <a:prstDash val="solid"/>
                     </a:lnL>
                     <a:lnR w="9525" cap="flat" cmpd="sng" algn="ctr">
                       <a:solidFill>
-                        <a:srgbClr val="308854"/>
+                        <a:srgbClr val="26C5B8"/>
                       </a:solidFill>
                       <a:prstDash val="solid"/>
                     </a:lnR>
                     <a:lnT w="9525" cap="flat" cmpd="sng" algn="ctr">
                       <a:solidFill>
-                        <a:srgbClr val="308854"/>
+                        <a:srgbClr val="26C5B8"/>
                       </a:solidFill>
                       <a:prstDash val="solid"/>
                     </a:lnT>
                     <a:lnB w="9525" cap="flat" cmpd="sng" algn="ctr">
                       <a:solidFill>
-                        <a:srgbClr val="308854"/>
+                        <a:srgbClr val="26C5B8"/>
                       </a:solidFill>
                       <a:prstDash val="solid"/>
                     </a:lnB>
                     <a:solidFill>
-                      <a:srgbClr val="308854"/>
+                      <a:srgbClr val="26C5B8"/>
                     </a:solidFill>
                   </a:tcPr>
                 </a:tc>
@@ -5433,30 +5433,30 @@
                   <a:tcPr anchor="ctr" marL="73152" marR="73152">
                     <a:lnL w="9525" cap="flat" cmpd="sng" algn="ctr">
                       <a:solidFill>
-                        <a:srgbClr val="308854"/>
+                        <a:srgbClr val="26C5B8"/>
                       </a:solidFill>
                       <a:prstDash val="solid"/>
                     </a:lnL>
                     <a:lnR w="9525" cap="flat" cmpd="sng" algn="ctr">
                       <a:solidFill>
-                        <a:srgbClr val="308854"/>
+                        <a:srgbClr val="26C5B8"/>
                       </a:solidFill>
                       <a:prstDash val="solid"/>
                     </a:lnR>
                     <a:lnT w="9525" cap="flat" cmpd="sng" algn="ctr">
                       <a:solidFill>
-                        <a:srgbClr val="308854"/>
+                        <a:srgbClr val="26C5B8"/>
                       </a:solidFill>
                       <a:prstDash val="solid"/>
                     </a:lnT>
                     <a:lnB w="9525" cap="flat" cmpd="sng" algn="ctr">
                       <a:solidFill>
-                        <a:srgbClr val="308854"/>
+                        <a:srgbClr val="26C5B8"/>
                       </a:solidFill>
                       <a:prstDash val="solid"/>
                     </a:lnB>
                     <a:solidFill>
-                      <a:srgbClr val="308854"/>
+                      <a:srgbClr val="26C5B8"/>
                     </a:solidFill>
                   </a:tcPr>
                 </a:tc>
@@ -5471,7 +5471,7 @@
                       <a:r>
                         <a:rPr sz="1600" b="1">
                           <a:solidFill>
-                            <a:srgbClr val="153C26"/>
+                            <a:srgbClr val="115F59"/>
                           </a:solidFill>
                         </a:rPr>
                         <a:t>키(cm)</a:t>
@@ -5481,30 +5481,30 @@
                   <a:tcPr anchor="ctr" marL="73152" marR="73152">
                     <a:lnL w="9525" cap="flat" cmpd="sng" algn="ctr">
                       <a:solidFill>
-                        <a:srgbClr val="D0F1DE"/>
+                        <a:srgbClr val="D1FAF7"/>
                       </a:solidFill>
                       <a:prstDash val="solid"/>
                     </a:lnL>
                     <a:lnR w="9525" cap="flat" cmpd="sng" algn="ctr">
                       <a:solidFill>
-                        <a:srgbClr val="D0F1DE"/>
+                        <a:srgbClr val="D1FAF7"/>
                       </a:solidFill>
                       <a:prstDash val="solid"/>
                     </a:lnR>
                     <a:lnT w="9525" cap="flat" cmpd="sng" algn="ctr">
                       <a:solidFill>
-                        <a:srgbClr val="D0F1DE"/>
+                        <a:srgbClr val="D1FAF7"/>
                       </a:solidFill>
                       <a:prstDash val="solid"/>
                     </a:lnT>
                     <a:lnB w="9525" cap="flat" cmpd="sng" algn="ctr">
                       <a:solidFill>
-                        <a:srgbClr val="D0F1DE"/>
+                        <a:srgbClr val="D1FAF7"/>
                       </a:solidFill>
                       <a:prstDash val="solid"/>
                     </a:lnB>
                     <a:solidFill>
-                      <a:srgbClr val="D0F1DE"/>
+                      <a:srgbClr val="D1FAF7"/>
                     </a:solidFill>
                   </a:tcPr>
                 </a:tc>
@@ -5527,25 +5527,25 @@
                   <a:tcPr anchor="ctr" marL="73152" marR="73152">
                     <a:lnL w="9525" cap="flat" cmpd="sng" algn="ctr">
                       <a:solidFill>
-                        <a:srgbClr val="D0F1DE"/>
+                        <a:srgbClr val="D1FAF7"/>
                       </a:solidFill>
                       <a:prstDash val="solid"/>
                     </a:lnL>
                     <a:lnR w="9525" cap="flat" cmpd="sng" algn="ctr">
                       <a:solidFill>
-                        <a:srgbClr val="D0F1DE"/>
+                        <a:srgbClr val="D1FAF7"/>
                       </a:solidFill>
                       <a:prstDash val="solid"/>
                     </a:lnR>
                     <a:lnT w="9525" cap="flat" cmpd="sng" algn="ctr">
                       <a:solidFill>
-                        <a:srgbClr val="D0F1DE"/>
+                        <a:srgbClr val="D1FAF7"/>
                       </a:solidFill>
                       <a:prstDash val="solid"/>
                     </a:lnT>
                     <a:lnB w="9525" cap="flat" cmpd="sng" algn="ctr">
                       <a:solidFill>
-                        <a:srgbClr val="D0F1DE"/>
+                        <a:srgbClr val="D1FAF7"/>
                       </a:solidFill>
                       <a:prstDash val="solid"/>
                     </a:lnB>
@@ -5573,25 +5573,25 @@
                   <a:tcPr anchor="ctr" marL="73152" marR="73152">
                     <a:lnL w="9525" cap="flat" cmpd="sng" algn="ctr">
                       <a:solidFill>
-                        <a:srgbClr val="D0F1DE"/>
+                        <a:srgbClr val="D1FAF7"/>
                       </a:solidFill>
                       <a:prstDash val="solid"/>
                     </a:lnL>
                     <a:lnR w="9525" cap="flat" cmpd="sng" algn="ctr">
                       <a:solidFill>
-                        <a:srgbClr val="D0F1DE"/>
+                        <a:srgbClr val="D1FAF7"/>
                       </a:solidFill>
                       <a:prstDash val="solid"/>
                     </a:lnR>
                     <a:lnT w="9525" cap="flat" cmpd="sng" algn="ctr">
                       <a:solidFill>
-                        <a:srgbClr val="D0F1DE"/>
+                        <a:srgbClr val="D1FAF7"/>
                       </a:solidFill>
                       <a:prstDash val="solid"/>
                     </a:lnT>
                     <a:lnB w="9525" cap="flat" cmpd="sng" algn="ctr">
                       <a:solidFill>
-                        <a:srgbClr val="D0F1DE"/>
+                        <a:srgbClr val="D1FAF7"/>
                       </a:solidFill>
                       <a:prstDash val="solid"/>
                     </a:lnB>
@@ -5619,25 +5619,25 @@
                   <a:tcPr anchor="ctr" marL="73152" marR="73152">
                     <a:lnL w="9525" cap="flat" cmpd="sng" algn="ctr">
                       <a:solidFill>
-                        <a:srgbClr val="D0F1DE"/>
+                        <a:srgbClr val="D1FAF7"/>
                       </a:solidFill>
                       <a:prstDash val="solid"/>
                     </a:lnL>
                     <a:lnR w="9525" cap="flat" cmpd="sng" algn="ctr">
                       <a:solidFill>
-                        <a:srgbClr val="D0F1DE"/>
+                        <a:srgbClr val="D1FAF7"/>
                       </a:solidFill>
                       <a:prstDash val="solid"/>
                     </a:lnR>
                     <a:lnT w="9525" cap="flat" cmpd="sng" algn="ctr">
                       <a:solidFill>
-                        <a:srgbClr val="D0F1DE"/>
+                        <a:srgbClr val="D1FAF7"/>
                       </a:solidFill>
                       <a:prstDash val="solid"/>
                     </a:lnT>
                     <a:lnB w="9525" cap="flat" cmpd="sng" algn="ctr">
                       <a:solidFill>
-                        <a:srgbClr val="D0F1DE"/>
+                        <a:srgbClr val="D1FAF7"/>
                       </a:solidFill>
                       <a:prstDash val="solid"/>
                     </a:lnB>
@@ -5665,25 +5665,25 @@
                   <a:tcPr anchor="ctr" marL="73152" marR="73152">
                     <a:lnL w="9525" cap="flat" cmpd="sng" algn="ctr">
                       <a:solidFill>
-                        <a:srgbClr val="D0F1DE"/>
+                        <a:srgbClr val="D1FAF7"/>
                       </a:solidFill>
                       <a:prstDash val="solid"/>
                     </a:lnL>
                     <a:lnR w="9525" cap="flat" cmpd="sng" algn="ctr">
                       <a:solidFill>
-                        <a:srgbClr val="D0F1DE"/>
+                        <a:srgbClr val="D1FAF7"/>
                       </a:solidFill>
                       <a:prstDash val="solid"/>
                     </a:lnR>
                     <a:lnT w="9525" cap="flat" cmpd="sng" algn="ctr">
                       <a:solidFill>
-                        <a:srgbClr val="D0F1DE"/>
+                        <a:srgbClr val="D1FAF7"/>
                       </a:solidFill>
                       <a:prstDash val="solid"/>
                     </a:lnT>
                     <a:lnB w="9525" cap="flat" cmpd="sng" algn="ctr">
                       <a:solidFill>
-                        <a:srgbClr val="D0F1DE"/>
+                        <a:srgbClr val="D1FAF7"/>
                       </a:solidFill>
                       <a:prstDash val="solid"/>
                     </a:lnB>
@@ -5703,7 +5703,7 @@
                       <a:r>
                         <a:rPr sz="1600" b="1">
                           <a:solidFill>
-                            <a:srgbClr val="153C26"/>
+                            <a:srgbClr val="115F59"/>
                           </a:solidFill>
                         </a:rPr>
                         <a:t>몸무게(kg)</a:t>
@@ -5713,30 +5713,30 @@
                   <a:tcPr anchor="ctr" marL="73152" marR="73152">
                     <a:lnL w="9525" cap="flat" cmpd="sng" algn="ctr">
                       <a:solidFill>
-                        <a:srgbClr val="D0F1DE"/>
+                        <a:srgbClr val="D1FAF7"/>
                       </a:solidFill>
                       <a:prstDash val="solid"/>
                     </a:lnL>
                     <a:lnR w="9525" cap="flat" cmpd="sng" algn="ctr">
                       <a:solidFill>
-                        <a:srgbClr val="D0F1DE"/>
+                        <a:srgbClr val="D1FAF7"/>
                       </a:solidFill>
                       <a:prstDash val="solid"/>
                     </a:lnR>
                     <a:lnT w="9525" cap="flat" cmpd="sng" algn="ctr">
                       <a:solidFill>
-                        <a:srgbClr val="D0F1DE"/>
+                        <a:srgbClr val="D1FAF7"/>
                       </a:solidFill>
                       <a:prstDash val="solid"/>
                     </a:lnT>
                     <a:lnB w="9525" cap="flat" cmpd="sng" algn="ctr">
                       <a:solidFill>
-                        <a:srgbClr val="D0F1DE"/>
+                        <a:srgbClr val="D1FAF7"/>
                       </a:solidFill>
                       <a:prstDash val="solid"/>
                     </a:lnB>
                     <a:solidFill>
-                      <a:srgbClr val="D0F1DE"/>
+                      <a:srgbClr val="D1FAF7"/>
                     </a:solidFill>
                   </a:tcPr>
                 </a:tc>
@@ -5759,30 +5759,30 @@
                   <a:tcPr anchor="ctr" marL="73152" marR="73152">
                     <a:lnL w="9525" cap="flat" cmpd="sng" algn="ctr">
                       <a:solidFill>
-                        <a:srgbClr val="D0F1DE"/>
+                        <a:srgbClr val="D1FAF7"/>
                       </a:solidFill>
                       <a:prstDash val="solid"/>
                     </a:lnL>
                     <a:lnR w="9525" cap="flat" cmpd="sng" algn="ctr">
                       <a:solidFill>
-                        <a:srgbClr val="D0F1DE"/>
+                        <a:srgbClr val="D1FAF7"/>
                       </a:solidFill>
                       <a:prstDash val="solid"/>
                     </a:lnR>
                     <a:lnT w="9525" cap="flat" cmpd="sng" algn="ctr">
                       <a:solidFill>
-                        <a:srgbClr val="D0F1DE"/>
+                        <a:srgbClr val="D1FAF7"/>
                       </a:solidFill>
                       <a:prstDash val="solid"/>
                     </a:lnT>
                     <a:lnB w="9525" cap="flat" cmpd="sng" algn="ctr">
                       <a:solidFill>
-                        <a:srgbClr val="D0F1DE"/>
+                        <a:srgbClr val="D1FAF7"/>
                       </a:solidFill>
                       <a:prstDash val="solid"/>
                     </a:lnB>
                     <a:solidFill>
-                      <a:srgbClr val="F0FAF4"/>
+                      <a:srgbClr val="EEFCFB"/>
                     </a:solidFill>
                   </a:tcPr>
                 </a:tc>
@@ -5805,30 +5805,30 @@
                   <a:tcPr anchor="ctr" marL="73152" marR="73152">
                     <a:lnL w="9525" cap="flat" cmpd="sng" algn="ctr">
                       <a:solidFill>
-                        <a:srgbClr val="D0F1DE"/>
+                        <a:srgbClr val="D1FAF7"/>
                       </a:solidFill>
                       <a:prstDash val="solid"/>
                     </a:lnL>
                     <a:lnR w="9525" cap="flat" cmpd="sng" algn="ctr">
                       <a:solidFill>
-                        <a:srgbClr val="D0F1DE"/>
+                        <a:srgbClr val="D1FAF7"/>
                       </a:solidFill>
                       <a:prstDash val="solid"/>
                     </a:lnR>
                     <a:lnT w="9525" cap="flat" cmpd="sng" algn="ctr">
                       <a:solidFill>
-                        <a:srgbClr val="D0F1DE"/>
+                        <a:srgbClr val="D1FAF7"/>
                       </a:solidFill>
                       <a:prstDash val="solid"/>
                     </a:lnT>
                     <a:lnB w="9525" cap="flat" cmpd="sng" algn="ctr">
                       <a:solidFill>
-                        <a:srgbClr val="D0F1DE"/>
+                        <a:srgbClr val="D1FAF7"/>
                       </a:solidFill>
                       <a:prstDash val="solid"/>
                     </a:lnB>
                     <a:solidFill>
-                      <a:srgbClr val="F0FAF4"/>
+                      <a:srgbClr val="EEFCFB"/>
                     </a:solidFill>
                   </a:tcPr>
                 </a:tc>
@@ -5851,30 +5851,30 @@
                   <a:tcPr anchor="ctr" marL="73152" marR="73152">
                     <a:lnL w="9525" cap="flat" cmpd="sng" algn="ctr">
                       <a:solidFill>
-                        <a:srgbClr val="D0F1DE"/>
+                        <a:srgbClr val="D1FAF7"/>
                       </a:solidFill>
                       <a:prstDash val="solid"/>
                     </a:lnL>
                     <a:lnR w="9525" cap="flat" cmpd="sng" algn="ctr">
                       <a:solidFill>
-                        <a:srgbClr val="D0F1DE"/>
+                        <a:srgbClr val="D1FAF7"/>
                       </a:solidFill>
                       <a:prstDash val="solid"/>
                     </a:lnR>
                     <a:lnT w="9525" cap="flat" cmpd="sng" algn="ctr">
                       <a:solidFill>
-                        <a:srgbClr val="D0F1DE"/>
+                        <a:srgbClr val="D1FAF7"/>
                       </a:solidFill>
                       <a:prstDash val="solid"/>
                     </a:lnT>
                     <a:lnB w="9525" cap="flat" cmpd="sng" algn="ctr">
                       <a:solidFill>
-                        <a:srgbClr val="D0F1DE"/>
+                        <a:srgbClr val="D1FAF7"/>
                       </a:solidFill>
                       <a:prstDash val="solid"/>
                     </a:lnB>
                     <a:solidFill>
-                      <a:srgbClr val="F0FAF4"/>
+                      <a:srgbClr val="EEFCFB"/>
                     </a:solidFill>
                   </a:tcPr>
                 </a:tc>
@@ -5897,30 +5897,30 @@
                   <a:tcPr anchor="ctr" marL="73152" marR="73152">
                     <a:lnL w="9525" cap="flat" cmpd="sng" algn="ctr">
                       <a:solidFill>
-                        <a:srgbClr val="D0F1DE"/>
+                        <a:srgbClr val="D1FAF7"/>
                       </a:solidFill>
                       <a:prstDash val="solid"/>
                     </a:lnL>
                     <a:lnR w="9525" cap="flat" cmpd="sng" algn="ctr">
                       <a:solidFill>
-                        <a:srgbClr val="D0F1DE"/>
+                        <a:srgbClr val="D1FAF7"/>
                       </a:solidFill>
                       <a:prstDash val="solid"/>
                     </a:lnR>
                     <a:lnT w="9525" cap="flat" cmpd="sng" algn="ctr">
                       <a:solidFill>
-                        <a:srgbClr val="D0F1DE"/>
+                        <a:srgbClr val="D1FAF7"/>
                       </a:solidFill>
                       <a:prstDash val="solid"/>
                     </a:lnT>
                     <a:lnB w="9525" cap="flat" cmpd="sng" algn="ctr">
                       <a:solidFill>
-                        <a:srgbClr val="D0F1DE"/>
+                        <a:srgbClr val="D1FAF7"/>
                       </a:solidFill>
                       <a:prstDash val="solid"/>
                     </a:lnB>
                     <a:solidFill>
-                      <a:srgbClr val="F0FAF4"/>
+                      <a:srgbClr val="EEFCFB"/>
                     </a:solidFill>
                   </a:tcPr>
                 </a:tc>
@@ -5935,7 +5935,7 @@
                       <a:r>
                         <a:rPr sz="1600" b="1">
                           <a:solidFill>
-                            <a:srgbClr val="153C26"/>
+                            <a:srgbClr val="115F59"/>
                           </a:solidFill>
                         </a:rPr>
                         <a:t>새로 한 것</a:t>
@@ -5945,30 +5945,30 @@
                   <a:tcPr anchor="ctr" marL="73152" marR="73152">
                     <a:lnL w="9525" cap="flat" cmpd="sng" algn="ctr">
                       <a:solidFill>
-                        <a:srgbClr val="D0F1DE"/>
+                        <a:srgbClr val="D1FAF7"/>
                       </a:solidFill>
                       <a:prstDash val="solid"/>
                     </a:lnL>
                     <a:lnR w="9525" cap="flat" cmpd="sng" algn="ctr">
                       <a:solidFill>
-                        <a:srgbClr val="D0F1DE"/>
+                        <a:srgbClr val="D1FAF7"/>
                       </a:solidFill>
                       <a:prstDash val="solid"/>
                     </a:lnR>
                     <a:lnT w="9525" cap="flat" cmpd="sng" algn="ctr">
                       <a:solidFill>
-                        <a:srgbClr val="D0F1DE"/>
+                        <a:srgbClr val="D1FAF7"/>
                       </a:solidFill>
                       <a:prstDash val="solid"/>
                     </a:lnT>
                     <a:lnB w="9525" cap="flat" cmpd="sng" algn="ctr">
                       <a:solidFill>
-                        <a:srgbClr val="D0F1DE"/>
+                        <a:srgbClr val="D1FAF7"/>
                       </a:solidFill>
                       <a:prstDash val="solid"/>
                     </a:lnB>
                     <a:solidFill>
-                      <a:srgbClr val="D0F1DE"/>
+                      <a:srgbClr val="D1FAF7"/>
                     </a:solidFill>
                   </a:tcPr>
                 </a:tc>
@@ -5991,25 +5991,25 @@
                   <a:tcPr anchor="ctr" marL="73152" marR="73152">
                     <a:lnL w="9525" cap="flat" cmpd="sng" algn="ctr">
                       <a:solidFill>
-                        <a:srgbClr val="D0F1DE"/>
+                        <a:srgbClr val="D1FAF7"/>
                       </a:solidFill>
                       <a:prstDash val="solid"/>
                     </a:lnL>
                     <a:lnR w="9525" cap="flat" cmpd="sng" algn="ctr">
                       <a:solidFill>
-                        <a:srgbClr val="D0F1DE"/>
+                        <a:srgbClr val="D1FAF7"/>
                       </a:solidFill>
                       <a:prstDash val="solid"/>
                     </a:lnR>
                     <a:lnT w="9525" cap="flat" cmpd="sng" algn="ctr">
                       <a:solidFill>
-                        <a:srgbClr val="D0F1DE"/>
+                        <a:srgbClr val="D1FAF7"/>
                       </a:solidFill>
                       <a:prstDash val="solid"/>
                     </a:lnT>
                     <a:lnB w="9525" cap="flat" cmpd="sng" algn="ctr">
                       <a:solidFill>
-                        <a:srgbClr val="D0F1DE"/>
+                        <a:srgbClr val="D1FAF7"/>
                       </a:solidFill>
                       <a:prstDash val="solid"/>
                     </a:lnB>
@@ -6037,25 +6037,25 @@
                   <a:tcPr anchor="ctr" marL="73152" marR="73152">
                     <a:lnL w="9525" cap="flat" cmpd="sng" algn="ctr">
                       <a:solidFill>
-                        <a:srgbClr val="D0F1DE"/>
+                        <a:srgbClr val="D1FAF7"/>
                       </a:solidFill>
                       <a:prstDash val="solid"/>
                     </a:lnL>
                     <a:lnR w="9525" cap="flat" cmpd="sng" algn="ctr">
                       <a:solidFill>
-                        <a:srgbClr val="D0F1DE"/>
+                        <a:srgbClr val="D1FAF7"/>
                       </a:solidFill>
                       <a:prstDash val="solid"/>
                     </a:lnR>
                     <a:lnT w="9525" cap="flat" cmpd="sng" algn="ctr">
                       <a:solidFill>
-                        <a:srgbClr val="D0F1DE"/>
+                        <a:srgbClr val="D1FAF7"/>
                       </a:solidFill>
                       <a:prstDash val="solid"/>
                     </a:lnT>
                     <a:lnB w="9525" cap="flat" cmpd="sng" algn="ctr">
                       <a:solidFill>
-                        <a:srgbClr val="D0F1DE"/>
+                        <a:srgbClr val="D1FAF7"/>
                       </a:solidFill>
                       <a:prstDash val="solid"/>
                     </a:lnB>
@@ -6083,25 +6083,25 @@
                   <a:tcPr anchor="ctr" marL="73152" marR="73152">
                     <a:lnL w="9525" cap="flat" cmpd="sng" algn="ctr">
                       <a:solidFill>
-                        <a:srgbClr val="D0F1DE"/>
+                        <a:srgbClr val="D1FAF7"/>
                       </a:solidFill>
                       <a:prstDash val="solid"/>
                     </a:lnL>
                     <a:lnR w="9525" cap="flat" cmpd="sng" algn="ctr">
                       <a:solidFill>
-                        <a:srgbClr val="D0F1DE"/>
+                        <a:srgbClr val="D1FAF7"/>
                       </a:solidFill>
                       <a:prstDash val="solid"/>
                     </a:lnR>
                     <a:lnT w="9525" cap="flat" cmpd="sng" algn="ctr">
                       <a:solidFill>
-                        <a:srgbClr val="D0F1DE"/>
+                        <a:srgbClr val="D1FAF7"/>
                       </a:solidFill>
                       <a:prstDash val="solid"/>
                     </a:lnT>
                     <a:lnB w="9525" cap="flat" cmpd="sng" algn="ctr">
                       <a:solidFill>
-                        <a:srgbClr val="D0F1DE"/>
+                        <a:srgbClr val="D1FAF7"/>
                       </a:solidFill>
                       <a:prstDash val="solid"/>
                     </a:lnB>
@@ -6129,25 +6129,25 @@
                   <a:tcPr anchor="ctr" marL="73152" marR="73152">
                     <a:lnL w="9525" cap="flat" cmpd="sng" algn="ctr">
                       <a:solidFill>
-                        <a:srgbClr val="D0F1DE"/>
+                        <a:srgbClr val="D1FAF7"/>
                       </a:solidFill>
                       <a:prstDash val="solid"/>
                     </a:lnL>
                     <a:lnR w="9525" cap="flat" cmpd="sng" algn="ctr">
                       <a:solidFill>
-                        <a:srgbClr val="D0F1DE"/>
+                        <a:srgbClr val="D1FAF7"/>
                       </a:solidFill>
                       <a:prstDash val="solid"/>
                     </a:lnR>
                     <a:lnT w="9525" cap="flat" cmpd="sng" algn="ctr">
                       <a:solidFill>
-                        <a:srgbClr val="D0F1DE"/>
+                        <a:srgbClr val="D1FAF7"/>
                       </a:solidFill>
                       <a:prstDash val="solid"/>
                     </a:lnT>
                     <a:lnB w="9525" cap="flat" cmpd="sng" algn="ctr">
                       <a:solidFill>
-                        <a:srgbClr val="D0F1DE"/>
+                        <a:srgbClr val="D1FAF7"/>
                       </a:solidFill>
                       <a:prstDash val="solid"/>
                     </a:lnB>
@@ -6175,7 +6175,7 @@
     <p:bg>
       <p:bgPr>
         <a:solidFill>
-          <a:srgbClr val="F0FAF4"/>
+          <a:srgbClr val="EEFCFB"/>
         </a:solidFill>
         <a:effectLst/>
       </p:bgPr>
@@ -6204,7 +6204,7 @@
           <a:noFill/>
           <a:ln w="28575">
             <a:solidFill>
-              <a:srgbClr val="308854"/>
+              <a:srgbClr val="26C5B8"/>
             </a:solidFill>
           </a:ln>
         </p:spPr>
@@ -6233,7 +6233,7 @@
           <a:noFill/>
           <a:ln w="9525">
             <a:solidFill>
-              <a:srgbClr val="D0F1DE"/>
+              <a:srgbClr val="D1FAF7"/>
             </a:solidFill>
           </a:ln>
         </p:spPr>
@@ -6275,7 +6275,7 @@
             <a:r>
               <a:rPr sz="3000" b="1" i="0">
                 <a:solidFill>
-                  <a:srgbClr val="153C26"/>
+                  <a:srgbClr val="115F59"/>
                 </a:solidFill>
               </a:rPr>
               <a:t>사진 모음</a:t>
@@ -6300,11 +6300,11 @@
             </a:avLst>
           </a:prstGeom>
           <a:solidFill>
-            <a:srgbClr val="D0F1DE"/>
+            <a:srgbClr val="D1FAF7"/>
           </a:solidFill>
           <a:ln w="19050">
             <a:solidFill>
-              <a:srgbClr val="308854"/>
+              <a:srgbClr val="26C5B8"/>
             </a:solidFill>
             <a:prstDash val="dash"/>
           </a:ln>
@@ -6323,7 +6323,7 @@
             <a:r>
               <a:rPr sz="1200" b="0" i="0">
                 <a:solidFill>
-                  <a:srgbClr val="153C26"/>
+                  <a:srgbClr val="115F59"/>
                 </a:solidFill>
               </a:rPr>
               <a:t>사진 1</a:t>
@@ -6348,11 +6348,11 @@
             </a:avLst>
           </a:prstGeom>
           <a:solidFill>
-            <a:srgbClr val="D0F1DE"/>
+            <a:srgbClr val="D1FAF7"/>
           </a:solidFill>
           <a:ln w="19050">
             <a:solidFill>
-              <a:srgbClr val="308854"/>
+              <a:srgbClr val="26C5B8"/>
             </a:solidFill>
             <a:prstDash val="dash"/>
           </a:ln>
@@ -6371,7 +6371,7 @@
             <a:r>
               <a:rPr sz="1200" b="0" i="0">
                 <a:solidFill>
-                  <a:srgbClr val="153C26"/>
+                  <a:srgbClr val="115F59"/>
                 </a:solidFill>
               </a:rPr>
               <a:t>사진 2</a:t>
@@ -6396,11 +6396,11 @@
             </a:avLst>
           </a:prstGeom>
           <a:solidFill>
-            <a:srgbClr val="D0F1DE"/>
+            <a:srgbClr val="D1FAF7"/>
           </a:solidFill>
           <a:ln w="19050">
             <a:solidFill>
-              <a:srgbClr val="308854"/>
+              <a:srgbClr val="26C5B8"/>
             </a:solidFill>
             <a:prstDash val="dash"/>
           </a:ln>
@@ -6419,7 +6419,7 @@
             <a:r>
               <a:rPr sz="1200" b="0" i="0">
                 <a:solidFill>
-                  <a:srgbClr val="153C26"/>
+                  <a:srgbClr val="115F59"/>
                 </a:solidFill>
               </a:rPr>
               <a:t>사진 3</a:t>
@@ -6444,11 +6444,11 @@
             </a:avLst>
           </a:prstGeom>
           <a:solidFill>
-            <a:srgbClr val="D0F1DE"/>
+            <a:srgbClr val="D1FAF7"/>
           </a:solidFill>
           <a:ln w="19050">
             <a:solidFill>
-              <a:srgbClr val="308854"/>
+              <a:srgbClr val="26C5B8"/>
             </a:solidFill>
             <a:prstDash val="dash"/>
           </a:ln>
@@ -6467,7 +6467,7 @@
             <a:r>
               <a:rPr sz="1200" b="0" i="0">
                 <a:solidFill>
-                  <a:srgbClr val="153C26"/>
+                  <a:srgbClr val="115F59"/>
                 </a:solidFill>
               </a:rPr>
               <a:t>사진 4</a:t>
@@ -6492,11 +6492,11 @@
             </a:avLst>
           </a:prstGeom>
           <a:solidFill>
-            <a:srgbClr val="D0F1DE"/>
+            <a:srgbClr val="D1FAF7"/>
           </a:solidFill>
           <a:ln w="19050">
             <a:solidFill>
-              <a:srgbClr val="308854"/>
+              <a:srgbClr val="26C5B8"/>
             </a:solidFill>
             <a:prstDash val="dash"/>
           </a:ln>
@@ -6515,7 +6515,7 @@
             <a:r>
               <a:rPr sz="1200" b="0" i="0">
                 <a:solidFill>
-                  <a:srgbClr val="153C26"/>
+                  <a:srgbClr val="115F59"/>
                 </a:solidFill>
               </a:rPr>
               <a:t>사진 5</a:t>
@@ -6540,11 +6540,11 @@
             </a:avLst>
           </a:prstGeom>
           <a:solidFill>
-            <a:srgbClr val="D0F1DE"/>
+            <a:srgbClr val="D1FAF7"/>
           </a:solidFill>
           <a:ln w="19050">
             <a:solidFill>
-              <a:srgbClr val="308854"/>
+              <a:srgbClr val="26C5B8"/>
             </a:solidFill>
             <a:prstDash val="dash"/>
           </a:ln>
@@ -6563,7 +6563,7 @@
             <a:r>
               <a:rPr sz="1200" b="0" i="0">
                 <a:solidFill>
-                  <a:srgbClr val="153C26"/>
+                  <a:srgbClr val="115F59"/>
                 </a:solidFill>
               </a:rPr>
               <a:t>사진 6</a:t>
@@ -6588,11 +6588,11 @@
             </a:avLst>
           </a:prstGeom>
           <a:solidFill>
-            <a:srgbClr val="D0F1DE"/>
+            <a:srgbClr val="D1FAF7"/>
           </a:solidFill>
           <a:ln w="19050">
             <a:solidFill>
-              <a:srgbClr val="308854"/>
+              <a:srgbClr val="26C5B8"/>
             </a:solidFill>
             <a:prstDash val="dash"/>
           </a:ln>
@@ -6611,7 +6611,7 @@
             <a:r>
               <a:rPr sz="1200" b="0" i="0">
                 <a:solidFill>
-                  <a:srgbClr val="153C26"/>
+                  <a:srgbClr val="115F59"/>
                 </a:solidFill>
               </a:rPr>
               <a:t>사진 7</a:t>
@@ -6636,11 +6636,11 @@
             </a:avLst>
           </a:prstGeom>
           <a:solidFill>
-            <a:srgbClr val="D0F1DE"/>
+            <a:srgbClr val="D1FAF7"/>
           </a:solidFill>
           <a:ln w="19050">
             <a:solidFill>
-              <a:srgbClr val="308854"/>
+              <a:srgbClr val="26C5B8"/>
             </a:solidFill>
             <a:prstDash val="dash"/>
           </a:ln>
@@ -6659,7 +6659,7 @@
             <a:r>
               <a:rPr sz="1200" b="0" i="0">
                 <a:solidFill>
-                  <a:srgbClr val="153C26"/>
+                  <a:srgbClr val="115F59"/>
                 </a:solidFill>
               </a:rPr>
               <a:t>사진 8</a:t>
@@ -6739,7 +6739,7 @@
             <a:r>
               <a:rPr sz="3400" b="1" i="0">
                 <a:solidFill>
-                  <a:srgbClr val="153C26"/>
+                  <a:srgbClr val="115F59"/>
                 </a:solidFill>
               </a:rPr>
               <a:t>와 주셔서 고맙습니다</a:t>
@@ -6777,7 +6777,7 @@
             <a:r>
               <a:rPr sz="1700" b="0" i="1">
                 <a:solidFill>
-                  <a:srgbClr val="153C26"/>
+                  <a:srgbClr val="115F59"/>
                 </a:solidFill>
               </a:rPr>
               <a:t>아이가 한 살이 되었습니다</a:t>
@@ -6842,34 +6842,34 @@
         <a:sysClr val="window" lastClr="FFFFFF"/>
       </a:lt1>
       <a:dk2>
-        <a:srgbClr val="153C26"/>
+        <a:srgbClr val="115F59"/>
       </a:dk2>
       <a:lt2>
-        <a:srgbClr val="F0FAF4"/>
+        <a:srgbClr val="EEFCFB"/>
       </a:lt2>
       <a:accent1>
-        <a:srgbClr val="308854"/>
+        <a:srgbClr val="26C5B8"/>
       </a:accent1>
       <a:accent2>
-        <a:srgbClr val="8A3B91"/>
+        <a:srgbClr val="209DB6"/>
       </a:accent2>
       <a:accent3>
-        <a:srgbClr val="153C26"/>
+        <a:srgbClr val="115F59"/>
       </a:accent3>
       <a:accent4>
-        <a:srgbClr val="D0F1DE"/>
+        <a:srgbClr val="D1FAF7"/>
       </a:accent4>
       <a:accent5>
-        <a:srgbClr val="5D6272"/>
+        <a:srgbClr val="23B1B7"/>
       </a:accent5>
       <a:accent6>
-        <a:srgbClr val="738A7D"/>
+        <a:srgbClr val="709F9B"/>
       </a:accent6>
       <a:hlink>
-        <a:srgbClr val="308854"/>
+        <a:srgbClr val="26C5B8"/>
       </a:hlink>
       <a:folHlink>
-        <a:srgbClr val="153C26"/>
+        <a:srgbClr val="115F59"/>
       </a:folHlink>
     </a:clrScheme>
     <a:fontScheme name="Office">

--- a/public/fun/pack/pptx/birthday/돌잔치_16_성장기록중심_평상수박.pptx
+++ b/public/fun/pack/pptx/birthday/돌잔치_16_성장기록중심_평상수박.pptx
@@ -3286,6 +3286,14 @@
 <file path=ppt/slides/slide1.xml><?xml version="1.0" encoding="utf-8"?>
 <p:sld xmlns:a="http://schemas.openxmlformats.org/drawingml/2006/main" xmlns:p="http://schemas.openxmlformats.org/presentationml/2006/main" xmlns:r="http://schemas.openxmlformats.org/officeDocument/2006/relationships">
   <p:cSld>
+    <p:bg>
+      <p:bgPr>
+        <a:solidFill>
+          <a:srgbClr val="EAFDF2"/>
+        </a:solidFill>
+        <a:effectLst/>
+      </p:bgPr>
+    </p:bg>
     <p:spTree>
       <p:nvGrpSpPr>
         <p:cNvPr id="1" name=""/>
@@ -3293,30 +3301,116 @@
         <p:nvPr/>
       </p:nvGrpSpPr>
       <p:grpSpPr/>
-      <p:pic>
-        <p:nvPicPr>
-          <p:cNvPr id="3" name="표지 그림" descr="birthday-16.jpg"/>
-          <p:cNvPicPr>
-            <a:picLocks noChangeAspect="1"/>
-          </p:cNvPicPr>
+      <p:sp>
+        <p:nvSpPr>
+          <p:cNvPr id="3" name="사진 자리"/>
+          <p:cNvSpPr/>
           <p:nvPr/>
-        </p:nvPicPr>
-        <p:blipFill>
-          <a:blip r:embed="rId2"/>
-          <a:stretch>
-            <a:fillRect/>
-          </a:stretch>
-        </p:blipFill>
-        <p:spPr>
-          <a:xfrm>
-            <a:off x="0" y="0"/>
-            <a:ext cx="12191695" cy="6858000"/>
+        </p:nvSpPr>
+        <p:spPr>
+          <a:xfrm>
+            <a:off x="7802684" y="0"/>
+            <a:ext cx="4389010" cy="6858000"/>
           </a:xfrm>
           <a:prstGeom prst="rect">
             <a:avLst/>
           </a:prstGeom>
-        </p:spPr>
-      </p:pic>
+          <a:solidFill>
+            <a:srgbClr val="A5F3C5"/>
+          </a:solidFill>
+          <a:ln>
+            <a:noFill/>
+          </a:ln>
+        </p:spPr>
+        <p:txBody>
+          <a:bodyPr rtlCol="0" anchor="ctr" wrap="square" lIns="54864" rIns="54864" tIns="27432" bIns="27432">
+            <a:noAutofit/>
+          </a:bodyPr>
+          <a:lstStyle/>
+          <a:p>
+            <a:pPr algn="ctr">
+              <a:lnSpc>
+                <a:spcPct val="100000"/>
+              </a:lnSpc>
+            </a:pPr>
+            <a:r>
+              <a:rPr sz="1400" b="0" i="0">
+                <a:solidFill>
+                  <a:srgbClr val="274935"/>
+                </a:solidFill>
+              </a:rPr>
+              <a:t>사진을 넣어 주세요</a:t>
+            </a:r>
+          </a:p>
+        </p:txBody>
+      </p:sp>
+      <p:sp>
+        <p:nvSpPr>
+          <p:cNvPr id="4" name="장식"/>
+          <p:cNvSpPr/>
+          <p:nvPr/>
+        </p:nvSpPr>
+        <p:spPr>
+          <a:xfrm>
+            <a:off x="8168435" y="365760"/>
+            <a:ext cx="3657508" cy="6126480"/>
+          </a:xfrm>
+          <a:prstGeom prst="rect">
+            <a:avLst/>
+          </a:prstGeom>
+          <a:noFill/>
+          <a:ln w="9525">
+            <a:solidFill>
+              <a:srgbClr val="26231F"/>
+            </a:solidFill>
+          </a:ln>
+        </p:spPr>
+        <p:txBody>
+          <a:bodyPr rtlCol="0" anchor="ctr"/>
+          <a:lstStyle/>
+          <a:p>
+            <a:pPr algn="ctr"/>
+          </a:p>
+        </p:txBody>
+      </p:sp>
+      <p:sp>
+        <p:nvSpPr>
+          <p:cNvPr id="5" name="라벨"/>
+          <p:cNvSpPr txBox="1"/>
+          <p:nvPr/>
+        </p:nvSpPr>
+        <p:spPr>
+          <a:xfrm>
+            <a:off x="822960" y="2148840"/>
+            <a:ext cx="5608179" cy="274320"/>
+          </a:xfrm>
+          <a:prstGeom prst="rect">
+            <a:avLst/>
+          </a:prstGeom>
+          <a:noFill/>
+        </p:spPr>
+        <p:txBody>
+          <a:bodyPr wrap="square" lIns="54864" rIns="54864" tIns="27432" bIns="27432" anchor="t">
+            <a:noAutofit/>
+          </a:bodyPr>
+          <a:lstStyle/>
+          <a:p>
+            <a:pPr algn="l">
+              <a:lnSpc>
+                <a:spcPct val="115000"/>
+              </a:lnSpc>
+            </a:pPr>
+            <a:r>
+              <a:rPr sz="1000" b="1" i="0" spc="250">
+                <a:solidFill>
+                  <a:srgbClr val="26231F"/>
+                </a:solidFill>
+              </a:rPr>
+              <a:t>FIRST BIRTHDAY</a:t>
+            </a:r>
+          </a:p>
+        </p:txBody>
+      </p:sp>
       <p:sp>
         <p:nvSpPr>
           <p:cNvPr id="2" name="Title 1"/>
@@ -3329,8 +3423,8 @@
         </p:nvSpPr>
         <p:spPr>
           <a:xfrm>
-            <a:off x="853418" y="2057400"/>
-            <a:ext cx="6095847" cy="1554480"/>
+            <a:off x="822960" y="2606040"/>
+            <a:ext cx="5608179" cy="1188720"/>
           </a:xfrm>
         </p:spPr>
         <p:txBody>
@@ -3347,7 +3441,7 @@
             <a:r>
               <a:rPr sz="4000" b="1" i="0">
                 <a:solidFill>
-                  <a:srgbClr val="115F59"/>
+                  <a:srgbClr val="26231F"/>
                 </a:solidFill>
               </a:rPr>
               <a:t>첫 번째 생일</a:t>
@@ -3357,14 +3451,14 @@
       </p:sp>
       <p:sp>
         <p:nvSpPr>
-          <p:cNvPr id="4" name="한 줄 문구"/>
+          <p:cNvPr id="6" name="한 줄 문구"/>
           <p:cNvSpPr txBox="1"/>
           <p:nvPr/>
         </p:nvSpPr>
         <p:spPr>
           <a:xfrm>
-            <a:off x="853418" y="3749039"/>
-            <a:ext cx="6095847" cy="822960"/>
+            <a:off x="822960" y="3886200"/>
+            <a:ext cx="5608179" cy="822960"/>
           </a:xfrm>
           <a:prstGeom prst="rect">
             <a:avLst/>
@@ -3383,9 +3477,9 @@
               </a:lnSpc>
             </a:pPr>
             <a:r>
-              <a:rPr sz="1700" b="0" i="1">
+              <a:rPr sz="1700" b="0" i="0">
                 <a:solidFill>
-                  <a:srgbClr val="115F59"/>
+                  <a:srgbClr val="26231F"/>
                 </a:solidFill>
               </a:rPr>
               <a:t>처음 이가 나던 날을 기억합니다</a:t>
@@ -3395,14 +3489,14 @@
       </p:sp>
       <p:sp>
         <p:nvSpPr>
-          <p:cNvPr id="5" name="안내 문구"/>
+          <p:cNvPr id="7" name="안내 문구"/>
           <p:cNvSpPr txBox="1"/>
           <p:nvPr/>
         </p:nvSpPr>
         <p:spPr>
           <a:xfrm>
-            <a:off x="853418" y="4617720"/>
-            <a:ext cx="6095847" cy="914400"/>
+            <a:off x="822960" y="4754880"/>
+            <a:ext cx="5608179" cy="914400"/>
           </a:xfrm>
           <a:prstGeom prst="rect">
             <a:avLst/>
@@ -3423,10 +3517,10 @@
             <a:r>
               <a:rPr sz="1400" b="0" i="0">
                 <a:solidFill>
-                  <a:srgbClr val="666666"/>
+                  <a:srgbClr val="26231F"/>
                 </a:solidFill>
               </a:rPr>
-              <a:t>아기 이름 · 2027. 00. 00</a:t>
+              <a:t>아기 이름 · 날짜 입력</a:t>
             </a:r>
           </a:p>
           <a:p>
@@ -3438,7 +3532,7 @@
             <a:r>
               <a:rPr sz="1400" b="0" i="0">
                 <a:solidFill>
-                  <a:srgbClr val="666666"/>
+                  <a:srgbClr val="26231F"/>
                 </a:solidFill>
               </a:rPr>
               <a:t>장소를 입력하세요</a:t>
@@ -3460,7 +3554,7 @@
     <p:bg>
       <p:bgPr>
         <a:solidFill>
-          <a:srgbClr val="EEFCFB"/>
+          <a:srgbClr val="EAFDF2"/>
         </a:solidFill>
         <a:effectLst/>
       </p:bgPr>
@@ -3480,46 +3574,84 @@
         </p:nvSpPr>
         <p:spPr>
           <a:xfrm>
-            <a:off x="256032" y="256032"/>
-            <a:ext cx="11679631" cy="6345936"/>
+            <a:off x="10180015" y="-1645920"/>
+            <a:ext cx="3474720" cy="3474720"/>
+          </a:xfrm>
+          <a:prstGeom prst="ellipse">
+            <a:avLst/>
+          </a:prstGeom>
+          <a:solidFill>
+            <a:srgbClr val="A5F3C5"/>
+          </a:solidFill>
+          <a:ln>
+            <a:noFill/>
+          </a:ln>
+        </p:spPr>
+        <p:txBody>
+          <a:bodyPr rtlCol="0" anchor="ctr"/>
+          <a:lstStyle/>
+          <a:p>
+            <a:pPr algn="ctr"/>
+          </a:p>
+        </p:txBody>
+      </p:sp>
+      <p:sp>
+        <p:nvSpPr>
+          <p:cNvPr id="4" name="상단 라벨"/>
+          <p:cNvSpPr txBox="1"/>
+          <p:nvPr/>
+        </p:nvSpPr>
+        <p:spPr>
+          <a:xfrm>
+            <a:off x="640080" y="274320"/>
+            <a:ext cx="5486400" cy="274320"/>
           </a:xfrm>
           <a:prstGeom prst="rect">
             <a:avLst/>
           </a:prstGeom>
           <a:noFill/>
-          <a:ln w="28575">
-            <a:solidFill>
-              <a:srgbClr val="26C5B8"/>
-            </a:solidFill>
-          </a:ln>
-        </p:spPr>
-        <p:txBody>
-          <a:bodyPr rtlCol="0" anchor="ctr"/>
-          <a:lstStyle/>
-          <a:p>
-            <a:pPr algn="ctr"/>
-          </a:p>
-        </p:txBody>
-      </p:sp>
-      <p:sp>
-        <p:nvSpPr>
-          <p:cNvPr id="4" name="장식"/>
+        </p:spPr>
+        <p:txBody>
+          <a:bodyPr wrap="square" lIns="54864" rIns="54864" tIns="27432" bIns="27432" anchor="ctr">
+            <a:noAutofit/>
+          </a:bodyPr>
+          <a:lstStyle/>
+          <a:p>
+            <a:pPr algn="l">
+              <a:lnSpc>
+                <a:spcPct val="115000"/>
+              </a:lnSpc>
+            </a:pPr>
+            <a:r>
+              <a:rPr sz="900" b="1" i="0" spc="250">
+                <a:solidFill>
+                  <a:srgbClr val="26231F"/>
+                </a:solidFill>
+              </a:rPr>
+              <a:t>FIRST BIRTHDAY</a:t>
+            </a:r>
+          </a:p>
+        </p:txBody>
+      </p:sp>
+      <p:sp>
+        <p:nvSpPr>
+          <p:cNvPr id="5" name="포인트"/>
           <p:cNvSpPr/>
           <p:nvPr/>
         </p:nvSpPr>
         <p:spPr>
-          <a:xfrm>
-            <a:off x="384048" y="384048"/>
-            <a:ext cx="11423599" cy="6089904"/>
-          </a:xfrm>
-          <a:prstGeom prst="rect">
+          <a:xfrm rot="18900000">
+            <a:off x="11048695" y="502919"/>
+            <a:ext cx="274320" cy="274320"/>
+          </a:xfrm>
+          <a:prstGeom prst="teardrop">
             <a:avLst/>
           </a:prstGeom>
-          <a:noFill/>
-          <a:ln w="9525">
-            <a:solidFill>
-              <a:srgbClr val="D1FAF7"/>
-            </a:solidFill>
+          <a:solidFill>
+            <a:srgbClr val="FFFFFF"/>
+          </a:solidFill>
+          <a:ln>
+            <a:noFill/>
           </a:ln>
         </p:spPr>
         <p:txBody>
@@ -3542,8 +3674,8 @@
         </p:nvSpPr>
         <p:spPr>
           <a:xfrm>
-            <a:off x="822960" y="548640"/>
-            <a:ext cx="9265615" cy="822960"/>
+            <a:off x="640080" y="658368"/>
+            <a:ext cx="9082735" cy="868680"/>
           </a:xfrm>
         </p:spPr>
         <p:txBody>
@@ -3560,7 +3692,7 @@
             <a:r>
               <a:rPr sz="3000" b="1" i="0">
                 <a:solidFill>
-                  <a:srgbClr val="115F59"/>
+                  <a:srgbClr val="26231F"/>
                 </a:solidFill>
               </a:rPr>
               <a:t>우리 아기를 소개합니다</a:t>
@@ -3570,14 +3702,14 @@
       </p:sp>
       <p:sp>
         <p:nvSpPr>
-          <p:cNvPr id="5" name="사진 자리"/>
+          <p:cNvPr id="6" name="사진 자리"/>
           <p:cNvSpPr/>
           <p:nvPr/>
         </p:nvSpPr>
         <p:spPr>
           <a:xfrm>
-            <a:off x="822960" y="1554480"/>
-            <a:ext cx="3840480" cy="4434840"/>
+            <a:off x="640080" y="1783080"/>
+            <a:ext cx="3840480" cy="4389120"/>
           </a:xfrm>
           <a:prstGeom prst="roundRect">
             <a:avLst>
@@ -3585,12 +3717,10 @@
             </a:avLst>
           </a:prstGeom>
           <a:solidFill>
-            <a:srgbClr val="D1FAF7"/>
+            <a:srgbClr val="D1FAE2"/>
           </a:solidFill>
           <a:ln w="19050">
-            <a:solidFill>
-              <a:srgbClr val="26C5B8"/>
-            </a:solidFill>
+            <a:noFill/>
             <a:prstDash val="dash"/>
           </a:ln>
         </p:spPr>
@@ -3608,7 +3738,7 @@
             <a:r>
               <a:rPr sz="1400" b="0" i="0">
                 <a:solidFill>
-                  <a:srgbClr val="115F59"/>
+                  <a:srgbClr val="8E8780"/>
                 </a:solidFill>
               </a:rPr>
               <a:t>아기 사진을 넣어 주세요</a:t>
@@ -3618,15 +3748,15 @@
       </p:sp>
       <p:graphicFrame>
         <p:nvGraphicFramePr>
-          <p:cNvPr id="6" name="표"/>
+          <p:cNvPr id="7" name="표"/>
           <p:cNvGraphicFramePr>
             <a:graphicFrameLocks noGrp="1"/>
           </p:cNvGraphicFramePr>
           <p:nvPr/>
         </p:nvGraphicFramePr>
         <p:xfrm>
-          <a:off x="5029200" y="1554480"/>
-          <a:ext cx="6339535" cy="3950208"/>
+          <a:off x="4846320" y="1783080"/>
+          <a:ext cx="6705295" cy="3950208"/>
         </p:xfrm>
         <a:graphic>
           <a:graphicData uri="http://schemas.openxmlformats.org/drawingml/2006/table">
@@ -3636,7 +3766,7 @@
               </a:tblPr>
               <a:tblGrid>
                 <a:gridCol w="1828800"/>
-                <a:gridCol w="4510735"/>
+                <a:gridCol w="4876495"/>
               </a:tblGrid>
               <a:tr h="658368">
                 <a:tc>
@@ -3648,7 +3778,7 @@
                       <a:r>
                         <a:rPr sz="1500" b="1">
                           <a:solidFill>
-                            <a:srgbClr val="115F59"/>
+                            <a:srgbClr val="274935"/>
                           </a:solidFill>
                         </a:rPr>
                         <a:t>이름</a:t>
@@ -3658,30 +3788,30 @@
                   <a:tcPr anchor="ctr" marL="73152" marR="73152">
                     <a:lnL w="9525" cap="flat" cmpd="sng" algn="ctr">
                       <a:solidFill>
-                        <a:srgbClr val="D1FAF7"/>
+                        <a:srgbClr val="D1FAE2"/>
                       </a:solidFill>
                       <a:prstDash val="solid"/>
                     </a:lnL>
                     <a:lnR w="9525" cap="flat" cmpd="sng" algn="ctr">
                       <a:solidFill>
-                        <a:srgbClr val="D1FAF7"/>
+                        <a:srgbClr val="D1FAE2"/>
                       </a:solidFill>
                       <a:prstDash val="solid"/>
                     </a:lnR>
                     <a:lnT w="9525" cap="flat" cmpd="sng" algn="ctr">
                       <a:solidFill>
-                        <a:srgbClr val="D1FAF7"/>
+                        <a:srgbClr val="D1FAE2"/>
                       </a:solidFill>
                       <a:prstDash val="solid"/>
                     </a:lnT>
                     <a:lnB w="9525" cap="flat" cmpd="sng" algn="ctr">
                       <a:solidFill>
-                        <a:srgbClr val="D1FAF7"/>
+                        <a:srgbClr val="D1FAE2"/>
                       </a:solidFill>
                       <a:prstDash val="solid"/>
                     </a:lnB>
                     <a:solidFill>
-                      <a:srgbClr val="D1FAF7"/>
+                      <a:srgbClr val="D1FAE2"/>
                     </a:solidFill>
                   </a:tcPr>
                 </a:tc>
@@ -3694,7 +3824,7 @@
                       <a:r>
                         <a:rPr sz="1500" b="0">
                           <a:solidFill>
-                            <a:srgbClr val="2B2B2B"/>
+                            <a:srgbClr val="26231F"/>
                           </a:solidFill>
                         </a:rPr>
                         <a:t>입력하세요</a:t>
@@ -3704,30 +3834,30 @@
                   <a:tcPr anchor="ctr" marL="73152" marR="73152">
                     <a:lnL w="9525" cap="flat" cmpd="sng" algn="ctr">
                       <a:solidFill>
-                        <a:srgbClr val="D1FAF7"/>
+                        <a:srgbClr val="D1FAE2"/>
                       </a:solidFill>
                       <a:prstDash val="solid"/>
                     </a:lnL>
                     <a:lnR w="9525" cap="flat" cmpd="sng" algn="ctr">
                       <a:solidFill>
-                        <a:srgbClr val="D1FAF7"/>
+                        <a:srgbClr val="D1FAE2"/>
                       </a:solidFill>
                       <a:prstDash val="solid"/>
                     </a:lnR>
                     <a:lnT w="9525" cap="flat" cmpd="sng" algn="ctr">
                       <a:solidFill>
-                        <a:srgbClr val="D1FAF7"/>
+                        <a:srgbClr val="D1FAE2"/>
                       </a:solidFill>
                       <a:prstDash val="solid"/>
                     </a:lnT>
                     <a:lnB w="9525" cap="flat" cmpd="sng" algn="ctr">
                       <a:solidFill>
-                        <a:srgbClr val="D1FAF7"/>
+                        <a:srgbClr val="D1FAE2"/>
                       </a:solidFill>
                       <a:prstDash val="solid"/>
                     </a:lnB>
                     <a:solidFill>
-                      <a:srgbClr val="EEFCFB"/>
+                      <a:srgbClr val="EAFDF2"/>
                     </a:solidFill>
                   </a:tcPr>
                 </a:tc>
@@ -3742,7 +3872,7 @@
                       <a:r>
                         <a:rPr sz="1500" b="1">
                           <a:solidFill>
-                            <a:srgbClr val="115F59"/>
+                            <a:srgbClr val="274935"/>
                           </a:solidFill>
                         </a:rPr>
                         <a:t>생일</a:t>
@@ -3752,30 +3882,30 @@
                   <a:tcPr anchor="ctr" marL="73152" marR="73152">
                     <a:lnL w="9525" cap="flat" cmpd="sng" algn="ctr">
                       <a:solidFill>
-                        <a:srgbClr val="D1FAF7"/>
+                        <a:srgbClr val="D1FAE2"/>
                       </a:solidFill>
                       <a:prstDash val="solid"/>
                     </a:lnL>
                     <a:lnR w="9525" cap="flat" cmpd="sng" algn="ctr">
                       <a:solidFill>
-                        <a:srgbClr val="D1FAF7"/>
+                        <a:srgbClr val="D1FAE2"/>
                       </a:solidFill>
                       <a:prstDash val="solid"/>
                     </a:lnR>
                     <a:lnT w="9525" cap="flat" cmpd="sng" algn="ctr">
                       <a:solidFill>
-                        <a:srgbClr val="D1FAF7"/>
+                        <a:srgbClr val="D1FAE2"/>
                       </a:solidFill>
                       <a:prstDash val="solid"/>
                     </a:lnT>
                     <a:lnB w="9525" cap="flat" cmpd="sng" algn="ctr">
                       <a:solidFill>
-                        <a:srgbClr val="D1FAF7"/>
+                        <a:srgbClr val="D1FAE2"/>
                       </a:solidFill>
                       <a:prstDash val="solid"/>
                     </a:lnB>
                     <a:solidFill>
-                      <a:srgbClr val="D1FAF7"/>
+                      <a:srgbClr val="D1FAE2"/>
                     </a:solidFill>
                   </a:tcPr>
                 </a:tc>
@@ -3788,7 +3918,7 @@
                       <a:r>
                         <a:rPr sz="1500" b="0">
                           <a:solidFill>
-                            <a:srgbClr val="2B2B2B"/>
+                            <a:srgbClr val="26231F"/>
                           </a:solidFill>
                         </a:rPr>
                         <a:t>입력하세요</a:t>
@@ -3798,25 +3928,25 @@
                   <a:tcPr anchor="ctr" marL="73152" marR="73152">
                     <a:lnL w="9525" cap="flat" cmpd="sng" algn="ctr">
                       <a:solidFill>
-                        <a:srgbClr val="D1FAF7"/>
+                        <a:srgbClr val="D1FAE2"/>
                       </a:solidFill>
                       <a:prstDash val="solid"/>
                     </a:lnL>
                     <a:lnR w="9525" cap="flat" cmpd="sng" algn="ctr">
                       <a:solidFill>
-                        <a:srgbClr val="D1FAF7"/>
+                        <a:srgbClr val="D1FAE2"/>
                       </a:solidFill>
                       <a:prstDash val="solid"/>
                     </a:lnR>
                     <a:lnT w="9525" cap="flat" cmpd="sng" algn="ctr">
                       <a:solidFill>
-                        <a:srgbClr val="D1FAF7"/>
+                        <a:srgbClr val="D1FAE2"/>
                       </a:solidFill>
                       <a:prstDash val="solid"/>
                     </a:lnT>
                     <a:lnB w="9525" cap="flat" cmpd="sng" algn="ctr">
                       <a:solidFill>
-                        <a:srgbClr val="D1FAF7"/>
+                        <a:srgbClr val="D1FAE2"/>
                       </a:solidFill>
                       <a:prstDash val="solid"/>
                     </a:lnB>
@@ -3836,7 +3966,7 @@
                       <a:r>
                         <a:rPr sz="1500" b="1">
                           <a:solidFill>
-                            <a:srgbClr val="115F59"/>
+                            <a:srgbClr val="274935"/>
                           </a:solidFill>
                         </a:rPr>
                         <a:t>키 · 몸무게</a:t>
@@ -3846,30 +3976,30 @@
                   <a:tcPr anchor="ctr" marL="73152" marR="73152">
                     <a:lnL w="9525" cap="flat" cmpd="sng" algn="ctr">
                       <a:solidFill>
-                        <a:srgbClr val="D1FAF7"/>
+                        <a:srgbClr val="D1FAE2"/>
                       </a:solidFill>
                       <a:prstDash val="solid"/>
                     </a:lnL>
                     <a:lnR w="9525" cap="flat" cmpd="sng" algn="ctr">
                       <a:solidFill>
-                        <a:srgbClr val="D1FAF7"/>
+                        <a:srgbClr val="D1FAE2"/>
                       </a:solidFill>
                       <a:prstDash val="solid"/>
                     </a:lnR>
                     <a:lnT w="9525" cap="flat" cmpd="sng" algn="ctr">
                       <a:solidFill>
-                        <a:srgbClr val="D1FAF7"/>
+                        <a:srgbClr val="D1FAE2"/>
                       </a:solidFill>
                       <a:prstDash val="solid"/>
                     </a:lnT>
                     <a:lnB w="9525" cap="flat" cmpd="sng" algn="ctr">
                       <a:solidFill>
-                        <a:srgbClr val="D1FAF7"/>
+                        <a:srgbClr val="D1FAE2"/>
                       </a:solidFill>
                       <a:prstDash val="solid"/>
                     </a:lnB>
                     <a:solidFill>
-                      <a:srgbClr val="D1FAF7"/>
+                      <a:srgbClr val="D1FAE2"/>
                     </a:solidFill>
                   </a:tcPr>
                 </a:tc>
@@ -3882,7 +4012,7 @@
                       <a:r>
                         <a:rPr sz="1500" b="0">
                           <a:solidFill>
-                            <a:srgbClr val="2B2B2B"/>
+                            <a:srgbClr val="26231F"/>
                           </a:solidFill>
                         </a:rPr>
                         <a:t>입력하세요</a:t>
@@ -3892,30 +4022,30 @@
                   <a:tcPr anchor="ctr" marL="73152" marR="73152">
                     <a:lnL w="9525" cap="flat" cmpd="sng" algn="ctr">
                       <a:solidFill>
-                        <a:srgbClr val="D1FAF7"/>
+                        <a:srgbClr val="D1FAE2"/>
                       </a:solidFill>
                       <a:prstDash val="solid"/>
                     </a:lnL>
                     <a:lnR w="9525" cap="flat" cmpd="sng" algn="ctr">
                       <a:solidFill>
-                        <a:srgbClr val="D1FAF7"/>
+                        <a:srgbClr val="D1FAE2"/>
                       </a:solidFill>
                       <a:prstDash val="solid"/>
                     </a:lnR>
                     <a:lnT w="9525" cap="flat" cmpd="sng" algn="ctr">
                       <a:solidFill>
-                        <a:srgbClr val="D1FAF7"/>
+                        <a:srgbClr val="D1FAE2"/>
                       </a:solidFill>
                       <a:prstDash val="solid"/>
                     </a:lnT>
                     <a:lnB w="9525" cap="flat" cmpd="sng" algn="ctr">
                       <a:solidFill>
-                        <a:srgbClr val="D1FAF7"/>
+                        <a:srgbClr val="D1FAE2"/>
                       </a:solidFill>
                       <a:prstDash val="solid"/>
                     </a:lnB>
                     <a:solidFill>
-                      <a:srgbClr val="EEFCFB"/>
+                      <a:srgbClr val="EAFDF2"/>
                     </a:solidFill>
                   </a:tcPr>
                 </a:tc>
@@ -3930,7 +4060,7 @@
                       <a:r>
                         <a:rPr sz="1500" b="1">
                           <a:solidFill>
-                            <a:srgbClr val="115F59"/>
+                            <a:srgbClr val="274935"/>
                           </a:solidFill>
                         </a:rPr>
                         <a:t>좋아하는 것</a:t>
@@ -3940,30 +4070,30 @@
                   <a:tcPr anchor="ctr" marL="73152" marR="73152">
                     <a:lnL w="9525" cap="flat" cmpd="sng" algn="ctr">
                       <a:solidFill>
-                        <a:srgbClr val="D1FAF7"/>
+                        <a:srgbClr val="D1FAE2"/>
                       </a:solidFill>
                       <a:prstDash val="solid"/>
                     </a:lnL>
                     <a:lnR w="9525" cap="flat" cmpd="sng" algn="ctr">
                       <a:solidFill>
-                        <a:srgbClr val="D1FAF7"/>
+                        <a:srgbClr val="D1FAE2"/>
                       </a:solidFill>
                       <a:prstDash val="solid"/>
                     </a:lnR>
                     <a:lnT w="9525" cap="flat" cmpd="sng" algn="ctr">
                       <a:solidFill>
-                        <a:srgbClr val="D1FAF7"/>
+                        <a:srgbClr val="D1FAE2"/>
                       </a:solidFill>
                       <a:prstDash val="solid"/>
                     </a:lnT>
                     <a:lnB w="9525" cap="flat" cmpd="sng" algn="ctr">
                       <a:solidFill>
-                        <a:srgbClr val="D1FAF7"/>
+                        <a:srgbClr val="D1FAE2"/>
                       </a:solidFill>
                       <a:prstDash val="solid"/>
                     </a:lnB>
                     <a:solidFill>
-                      <a:srgbClr val="D1FAF7"/>
+                      <a:srgbClr val="D1FAE2"/>
                     </a:solidFill>
                   </a:tcPr>
                 </a:tc>
@@ -3976,7 +4106,7 @@
                       <a:r>
                         <a:rPr sz="1500" b="0">
                           <a:solidFill>
-                            <a:srgbClr val="2B2B2B"/>
+                            <a:srgbClr val="26231F"/>
                           </a:solidFill>
                         </a:rPr>
                         <a:t>입력하세요</a:t>
@@ -3986,25 +4116,25 @@
                   <a:tcPr anchor="ctr" marL="73152" marR="73152">
                     <a:lnL w="9525" cap="flat" cmpd="sng" algn="ctr">
                       <a:solidFill>
-                        <a:srgbClr val="D1FAF7"/>
+                        <a:srgbClr val="D1FAE2"/>
                       </a:solidFill>
                       <a:prstDash val="solid"/>
                     </a:lnL>
                     <a:lnR w="9525" cap="flat" cmpd="sng" algn="ctr">
                       <a:solidFill>
-                        <a:srgbClr val="D1FAF7"/>
+                        <a:srgbClr val="D1FAE2"/>
                       </a:solidFill>
                       <a:prstDash val="solid"/>
                     </a:lnR>
                     <a:lnT w="9525" cap="flat" cmpd="sng" algn="ctr">
                       <a:solidFill>
-                        <a:srgbClr val="D1FAF7"/>
+                        <a:srgbClr val="D1FAE2"/>
                       </a:solidFill>
                       <a:prstDash val="solid"/>
                     </a:lnT>
                     <a:lnB w="9525" cap="flat" cmpd="sng" algn="ctr">
                       <a:solidFill>
-                        <a:srgbClr val="D1FAF7"/>
+                        <a:srgbClr val="D1FAE2"/>
                       </a:solidFill>
                       <a:prstDash val="solid"/>
                     </a:lnB>
@@ -4024,7 +4154,7 @@
                       <a:r>
                         <a:rPr sz="1500" b="1">
                           <a:solidFill>
-                            <a:srgbClr val="115F59"/>
+                            <a:srgbClr val="274935"/>
                           </a:solidFill>
                         </a:rPr>
                         <a:t>별명</a:t>
@@ -4034,30 +4164,30 @@
                   <a:tcPr anchor="ctr" marL="73152" marR="73152">
                     <a:lnL w="9525" cap="flat" cmpd="sng" algn="ctr">
                       <a:solidFill>
-                        <a:srgbClr val="D1FAF7"/>
+                        <a:srgbClr val="D1FAE2"/>
                       </a:solidFill>
                       <a:prstDash val="solid"/>
                     </a:lnL>
                     <a:lnR w="9525" cap="flat" cmpd="sng" algn="ctr">
                       <a:solidFill>
-                        <a:srgbClr val="D1FAF7"/>
+                        <a:srgbClr val="D1FAE2"/>
                       </a:solidFill>
                       <a:prstDash val="solid"/>
                     </a:lnR>
                     <a:lnT w="9525" cap="flat" cmpd="sng" algn="ctr">
                       <a:solidFill>
-                        <a:srgbClr val="D1FAF7"/>
+                        <a:srgbClr val="D1FAE2"/>
                       </a:solidFill>
                       <a:prstDash val="solid"/>
                     </a:lnT>
                     <a:lnB w="9525" cap="flat" cmpd="sng" algn="ctr">
                       <a:solidFill>
-                        <a:srgbClr val="D1FAF7"/>
+                        <a:srgbClr val="D1FAE2"/>
                       </a:solidFill>
                       <a:prstDash val="solid"/>
                     </a:lnB>
                     <a:solidFill>
-                      <a:srgbClr val="D1FAF7"/>
+                      <a:srgbClr val="D1FAE2"/>
                     </a:solidFill>
                   </a:tcPr>
                 </a:tc>
@@ -4070,7 +4200,7 @@
                       <a:r>
                         <a:rPr sz="1500" b="0">
                           <a:solidFill>
-                            <a:srgbClr val="2B2B2B"/>
+                            <a:srgbClr val="26231F"/>
                           </a:solidFill>
                         </a:rPr>
                         <a:t>입력하세요</a:t>
@@ -4080,30 +4210,30 @@
                   <a:tcPr anchor="ctr" marL="73152" marR="73152">
                     <a:lnL w="9525" cap="flat" cmpd="sng" algn="ctr">
                       <a:solidFill>
-                        <a:srgbClr val="D1FAF7"/>
+                        <a:srgbClr val="D1FAE2"/>
                       </a:solidFill>
                       <a:prstDash val="solid"/>
                     </a:lnL>
                     <a:lnR w="9525" cap="flat" cmpd="sng" algn="ctr">
                       <a:solidFill>
-                        <a:srgbClr val="D1FAF7"/>
+                        <a:srgbClr val="D1FAE2"/>
                       </a:solidFill>
                       <a:prstDash val="solid"/>
                     </a:lnR>
                     <a:lnT w="9525" cap="flat" cmpd="sng" algn="ctr">
                       <a:solidFill>
-                        <a:srgbClr val="D1FAF7"/>
+                        <a:srgbClr val="D1FAE2"/>
                       </a:solidFill>
                       <a:prstDash val="solid"/>
                     </a:lnT>
                     <a:lnB w="9525" cap="flat" cmpd="sng" algn="ctr">
                       <a:solidFill>
-                        <a:srgbClr val="D1FAF7"/>
+                        <a:srgbClr val="D1FAE2"/>
                       </a:solidFill>
                       <a:prstDash val="solid"/>
                     </a:lnB>
                     <a:solidFill>
-                      <a:srgbClr val="EEFCFB"/>
+                      <a:srgbClr val="EAFDF2"/>
                     </a:solidFill>
                   </a:tcPr>
                 </a:tc>
@@ -4118,7 +4248,7 @@
                       <a:r>
                         <a:rPr sz="1500" b="1">
                           <a:solidFill>
-                            <a:srgbClr val="115F59"/>
+                            <a:srgbClr val="274935"/>
                           </a:solidFill>
                         </a:rPr>
                         <a:t>부모의 마음</a:t>
@@ -4128,30 +4258,30 @@
                   <a:tcPr anchor="ctr" marL="73152" marR="73152">
                     <a:lnL w="9525" cap="flat" cmpd="sng" algn="ctr">
                       <a:solidFill>
-                        <a:srgbClr val="D1FAF7"/>
+                        <a:srgbClr val="D1FAE2"/>
                       </a:solidFill>
                       <a:prstDash val="solid"/>
                     </a:lnL>
                     <a:lnR w="9525" cap="flat" cmpd="sng" algn="ctr">
                       <a:solidFill>
-                        <a:srgbClr val="D1FAF7"/>
+                        <a:srgbClr val="D1FAE2"/>
                       </a:solidFill>
                       <a:prstDash val="solid"/>
                     </a:lnR>
                     <a:lnT w="9525" cap="flat" cmpd="sng" algn="ctr">
                       <a:solidFill>
-                        <a:srgbClr val="D1FAF7"/>
+                        <a:srgbClr val="D1FAE2"/>
                       </a:solidFill>
                       <a:prstDash val="solid"/>
                     </a:lnT>
                     <a:lnB w="9525" cap="flat" cmpd="sng" algn="ctr">
                       <a:solidFill>
-                        <a:srgbClr val="D1FAF7"/>
+                        <a:srgbClr val="D1FAE2"/>
                       </a:solidFill>
                       <a:prstDash val="solid"/>
                     </a:lnB>
                     <a:solidFill>
-                      <a:srgbClr val="D1FAF7"/>
+                      <a:srgbClr val="D1FAE2"/>
                     </a:solidFill>
                   </a:tcPr>
                 </a:tc>
@@ -4164,7 +4294,7 @@
                       <a:r>
                         <a:rPr sz="1500" b="0">
                           <a:solidFill>
-                            <a:srgbClr val="2B2B2B"/>
+                            <a:srgbClr val="26231F"/>
                           </a:solidFill>
                         </a:rPr>
                         <a:t>입력하세요</a:t>
@@ -4174,25 +4304,25 @@
                   <a:tcPr anchor="ctr" marL="73152" marR="73152">
                     <a:lnL w="9525" cap="flat" cmpd="sng" algn="ctr">
                       <a:solidFill>
-                        <a:srgbClr val="D1FAF7"/>
+                        <a:srgbClr val="D1FAE2"/>
                       </a:solidFill>
                       <a:prstDash val="solid"/>
                     </a:lnL>
                     <a:lnR w="9525" cap="flat" cmpd="sng" algn="ctr">
                       <a:solidFill>
-                        <a:srgbClr val="D1FAF7"/>
+                        <a:srgbClr val="D1FAE2"/>
                       </a:solidFill>
                       <a:prstDash val="solid"/>
                     </a:lnR>
                     <a:lnT w="9525" cap="flat" cmpd="sng" algn="ctr">
                       <a:solidFill>
-                        <a:srgbClr val="D1FAF7"/>
+                        <a:srgbClr val="D1FAE2"/>
                       </a:solidFill>
                       <a:prstDash val="solid"/>
                     </a:lnT>
                     <a:lnB w="9525" cap="flat" cmpd="sng" algn="ctr">
                       <a:solidFill>
-                        <a:srgbClr val="D1FAF7"/>
+                        <a:srgbClr val="D1FAE2"/>
                       </a:solidFill>
                       <a:prstDash val="solid"/>
                     </a:lnB>
@@ -4220,7 +4350,7 @@
     <p:bg>
       <p:bgPr>
         <a:solidFill>
-          <a:srgbClr val="EEFCFB"/>
+          <a:srgbClr val="EAFDF2"/>
         </a:solidFill>
         <a:effectLst/>
       </p:bgPr>
@@ -4240,46 +4370,84 @@
         </p:nvSpPr>
         <p:spPr>
           <a:xfrm>
-            <a:off x="256032" y="256032"/>
-            <a:ext cx="11679631" cy="6345936"/>
+            <a:off x="10180015" y="-1645920"/>
+            <a:ext cx="3474720" cy="3474720"/>
+          </a:xfrm>
+          <a:prstGeom prst="ellipse">
+            <a:avLst/>
+          </a:prstGeom>
+          <a:solidFill>
+            <a:srgbClr val="A5F3C5"/>
+          </a:solidFill>
+          <a:ln>
+            <a:noFill/>
+          </a:ln>
+        </p:spPr>
+        <p:txBody>
+          <a:bodyPr rtlCol="0" anchor="ctr"/>
+          <a:lstStyle/>
+          <a:p>
+            <a:pPr algn="ctr"/>
+          </a:p>
+        </p:txBody>
+      </p:sp>
+      <p:sp>
+        <p:nvSpPr>
+          <p:cNvPr id="4" name="상단 라벨"/>
+          <p:cNvSpPr txBox="1"/>
+          <p:nvPr/>
+        </p:nvSpPr>
+        <p:spPr>
+          <a:xfrm>
+            <a:off x="640080" y="274320"/>
+            <a:ext cx="5486400" cy="274320"/>
           </a:xfrm>
           <a:prstGeom prst="rect">
             <a:avLst/>
           </a:prstGeom>
           <a:noFill/>
-          <a:ln w="28575">
-            <a:solidFill>
-              <a:srgbClr val="26C5B8"/>
-            </a:solidFill>
-          </a:ln>
-        </p:spPr>
-        <p:txBody>
-          <a:bodyPr rtlCol="0" anchor="ctr"/>
-          <a:lstStyle/>
-          <a:p>
-            <a:pPr algn="ctr"/>
-          </a:p>
-        </p:txBody>
-      </p:sp>
-      <p:sp>
-        <p:nvSpPr>
-          <p:cNvPr id="4" name="장식"/>
+        </p:spPr>
+        <p:txBody>
+          <a:bodyPr wrap="square" lIns="54864" rIns="54864" tIns="27432" bIns="27432" anchor="ctr">
+            <a:noAutofit/>
+          </a:bodyPr>
+          <a:lstStyle/>
+          <a:p>
+            <a:pPr algn="l">
+              <a:lnSpc>
+                <a:spcPct val="115000"/>
+              </a:lnSpc>
+            </a:pPr>
+            <a:r>
+              <a:rPr sz="900" b="1" i="0" spc="250">
+                <a:solidFill>
+                  <a:srgbClr val="26231F"/>
+                </a:solidFill>
+              </a:rPr>
+              <a:t>FIRST BIRTHDAY</a:t>
+            </a:r>
+          </a:p>
+        </p:txBody>
+      </p:sp>
+      <p:sp>
+        <p:nvSpPr>
+          <p:cNvPr id="5" name="포인트"/>
           <p:cNvSpPr/>
           <p:nvPr/>
         </p:nvSpPr>
         <p:spPr>
-          <a:xfrm>
-            <a:off x="384048" y="384048"/>
-            <a:ext cx="11423599" cy="6089904"/>
-          </a:xfrm>
-          <a:prstGeom prst="rect">
+          <a:xfrm rot="18900000">
+            <a:off x="11048695" y="502919"/>
+            <a:ext cx="274320" cy="274320"/>
+          </a:xfrm>
+          <a:prstGeom prst="teardrop">
             <a:avLst/>
           </a:prstGeom>
-          <a:noFill/>
-          <a:ln w="9525">
-            <a:solidFill>
-              <a:srgbClr val="D1FAF7"/>
-            </a:solidFill>
+          <a:solidFill>
+            <a:srgbClr val="FFFFFF"/>
+          </a:solidFill>
+          <a:ln>
+            <a:noFill/>
           </a:ln>
         </p:spPr>
         <p:txBody>
@@ -4302,8 +4470,8 @@
         </p:nvSpPr>
         <p:spPr>
           <a:xfrm>
-            <a:off x="822960" y="548640"/>
-            <a:ext cx="9265615" cy="822960"/>
+            <a:off x="640080" y="658368"/>
+            <a:ext cx="9082735" cy="868680"/>
           </a:xfrm>
         </p:spPr>
         <p:txBody>
@@ -4320,7 +4488,7 @@
             <a:r>
               <a:rPr sz="3000" b="1" i="0">
                 <a:solidFill>
-                  <a:srgbClr val="115F59"/>
+                  <a:srgbClr val="26231F"/>
                 </a:solidFill>
               </a:rPr>
               <a:t>한 해 성장 기록</a:t>
@@ -4330,20 +4498,20 @@
       </p:sp>
       <p:sp>
         <p:nvSpPr>
-          <p:cNvPr id="5" name="타임라인 선"/>
+          <p:cNvPr id="6" name="타임라인 선"/>
           <p:cNvSpPr/>
           <p:nvPr/>
         </p:nvSpPr>
         <p:spPr>
           <a:xfrm>
-            <a:off x="822960" y="3291840"/>
-            <a:ext cx="10545775" cy="54864"/>
+            <a:off x="640080" y="3520440"/>
+            <a:ext cx="10911535" cy="54864"/>
           </a:xfrm>
           <a:prstGeom prst="rect">
             <a:avLst/>
           </a:prstGeom>
           <a:solidFill>
-            <a:srgbClr val="D1FAF7"/>
+            <a:srgbClr val="D1FAE2"/>
           </a:solidFill>
           <a:ln>
             <a:noFill/>
@@ -4359,20 +4527,20 @@
       </p:sp>
       <p:sp>
         <p:nvSpPr>
-          <p:cNvPr id="6" name="때 1"/>
+          <p:cNvPr id="7" name="때 1"/>
           <p:cNvSpPr/>
           <p:nvPr/>
         </p:nvSpPr>
         <p:spPr>
           <a:xfrm>
-            <a:off x="1676369" y="3108960"/>
+            <a:off x="1530065" y="3337560"/>
             <a:ext cx="402336" cy="402336"/>
           </a:xfrm>
           <a:prstGeom prst="ellipse">
             <a:avLst/>
           </a:prstGeom>
           <a:solidFill>
-            <a:srgbClr val="26C5B8"/>
+            <a:srgbClr val="7BEAA9"/>
           </a:solidFill>
           <a:ln w="38100">
             <a:solidFill>
@@ -4390,14 +4558,14 @@
       </p:sp>
       <p:sp>
         <p:nvSpPr>
-          <p:cNvPr id="7" name="TextBox 6"/>
+          <p:cNvPr id="8" name="TextBox 7"/>
           <p:cNvSpPr txBox="1"/>
           <p:nvPr/>
         </p:nvSpPr>
         <p:spPr>
           <a:xfrm>
-            <a:off x="868680" y="2468880"/>
-            <a:ext cx="2017715" cy="457200"/>
+            <a:off x="685800" y="2697480"/>
+            <a:ext cx="2090867" cy="457200"/>
           </a:xfrm>
           <a:prstGeom prst="rect">
             <a:avLst/>
@@ -4418,7 +4586,7 @@
             <a:r>
               <a:rPr sz="1400" b="1" i="0">
                 <a:solidFill>
-                  <a:srgbClr val="26C5B8"/>
+                  <a:srgbClr val="7BEAA9"/>
                 </a:solidFill>
               </a:rPr>
               <a:t>1개월</a:t>
@@ -4428,14 +4596,14 @@
       </p:sp>
       <p:sp>
         <p:nvSpPr>
-          <p:cNvPr id="8" name="TextBox 7"/>
+          <p:cNvPr id="9" name="TextBox 8"/>
           <p:cNvSpPr txBox="1"/>
           <p:nvPr/>
         </p:nvSpPr>
         <p:spPr>
           <a:xfrm>
-            <a:off x="914400" y="3657600"/>
-            <a:ext cx="1926275" cy="457200"/>
+            <a:off x="731519" y="3886200"/>
+            <a:ext cx="1999427" cy="457200"/>
           </a:xfrm>
           <a:prstGeom prst="rect">
             <a:avLst/>
@@ -4456,7 +4624,7 @@
             <a:r>
               <a:rPr sz="1600" b="1" i="0">
                 <a:solidFill>
-                  <a:srgbClr val="115F59"/>
+                  <a:srgbClr val="274935"/>
                 </a:solidFill>
               </a:rPr>
               <a:t>처음 눈을 맞춘 날</a:t>
@@ -4466,14 +4634,14 @@
       </p:sp>
       <p:sp>
         <p:nvSpPr>
-          <p:cNvPr id="9" name="TextBox 8"/>
+          <p:cNvPr id="10" name="TextBox 9"/>
           <p:cNvSpPr txBox="1"/>
           <p:nvPr/>
         </p:nvSpPr>
         <p:spPr>
           <a:xfrm>
-            <a:off x="914400" y="4160520"/>
-            <a:ext cx="1926275" cy="1645920"/>
+            <a:off x="731519" y="4389120"/>
+            <a:ext cx="1999427" cy="1645920"/>
           </a:xfrm>
           <a:prstGeom prst="rect">
             <a:avLst/>
@@ -4494,7 +4662,7 @@
             <a:r>
               <a:rPr sz="1300" b="0" i="0">
                 <a:solidFill>
-                  <a:srgbClr val="2B2B2B"/>
+                  <a:srgbClr val="26231F"/>
                 </a:solidFill>
               </a:rPr>
               <a:t>기억을 적어 주세요</a:t>
@@ -4504,20 +4672,20 @@
       </p:sp>
       <p:sp>
         <p:nvSpPr>
-          <p:cNvPr id="10" name="때 2"/>
+          <p:cNvPr id="11" name="때 2"/>
           <p:cNvSpPr/>
           <p:nvPr/>
         </p:nvSpPr>
         <p:spPr>
           <a:xfrm>
-            <a:off x="3785524" y="3108960"/>
+            <a:off x="3712372" y="3337560"/>
             <a:ext cx="402336" cy="402336"/>
           </a:xfrm>
           <a:prstGeom prst="ellipse">
             <a:avLst/>
           </a:prstGeom>
           <a:solidFill>
-            <a:srgbClr val="26C5B8"/>
+            <a:srgbClr val="7BEAA9"/>
           </a:solidFill>
           <a:ln w="38100">
             <a:solidFill>
@@ -4535,14 +4703,14 @@
       </p:sp>
       <p:sp>
         <p:nvSpPr>
-          <p:cNvPr id="11" name="TextBox 10"/>
+          <p:cNvPr id="12" name="TextBox 11"/>
           <p:cNvSpPr txBox="1"/>
           <p:nvPr/>
         </p:nvSpPr>
         <p:spPr>
           <a:xfrm>
-            <a:off x="2977835" y="2468880"/>
-            <a:ext cx="2017715" cy="457200"/>
+            <a:off x="2868107" y="2697480"/>
+            <a:ext cx="2090867" cy="457200"/>
           </a:xfrm>
           <a:prstGeom prst="rect">
             <a:avLst/>
@@ -4563,7 +4731,7 @@
             <a:r>
               <a:rPr sz="1400" b="1" i="0">
                 <a:solidFill>
-                  <a:srgbClr val="26C5B8"/>
+                  <a:srgbClr val="7BEAA9"/>
                 </a:solidFill>
               </a:rPr>
               <a:t>3개월</a:t>
@@ -4573,14 +4741,14 @@
       </p:sp>
       <p:sp>
         <p:nvSpPr>
-          <p:cNvPr id="12" name="TextBox 11"/>
+          <p:cNvPr id="13" name="TextBox 12"/>
           <p:cNvSpPr txBox="1"/>
           <p:nvPr/>
         </p:nvSpPr>
         <p:spPr>
           <a:xfrm>
-            <a:off x="3023555" y="3657600"/>
-            <a:ext cx="1926275" cy="457200"/>
+            <a:off x="2913827" y="3886200"/>
+            <a:ext cx="1999427" cy="457200"/>
           </a:xfrm>
           <a:prstGeom prst="rect">
             <a:avLst/>
@@ -4601,7 +4769,7 @@
             <a:r>
               <a:rPr sz="1600" b="1" i="0">
                 <a:solidFill>
-                  <a:srgbClr val="115F59"/>
+                  <a:srgbClr val="274935"/>
                 </a:solidFill>
               </a:rPr>
               <a:t>처음 웃은 날</a:t>
@@ -4611,14 +4779,14 @@
       </p:sp>
       <p:sp>
         <p:nvSpPr>
-          <p:cNvPr id="13" name="TextBox 12"/>
+          <p:cNvPr id="14" name="TextBox 13"/>
           <p:cNvSpPr txBox="1"/>
           <p:nvPr/>
         </p:nvSpPr>
         <p:spPr>
           <a:xfrm>
-            <a:off x="3023555" y="4160520"/>
-            <a:ext cx="1926275" cy="1645920"/>
+            <a:off x="2913827" y="4389120"/>
+            <a:ext cx="1999427" cy="1645920"/>
           </a:xfrm>
           <a:prstGeom prst="rect">
             <a:avLst/>
@@ -4639,7 +4807,7 @@
             <a:r>
               <a:rPr sz="1300" b="0" i="0">
                 <a:solidFill>
-                  <a:srgbClr val="2B2B2B"/>
+                  <a:srgbClr val="26231F"/>
                 </a:solidFill>
               </a:rPr>
               <a:t>기억을 적어 주세요</a:t>
@@ -4649,20 +4817,20 @@
       </p:sp>
       <p:sp>
         <p:nvSpPr>
-          <p:cNvPr id="14" name="때 3"/>
+          <p:cNvPr id="15" name="때 3"/>
           <p:cNvSpPr/>
           <p:nvPr/>
         </p:nvSpPr>
         <p:spPr>
           <a:xfrm>
-            <a:off x="5894679" y="3108960"/>
+            <a:off x="5894679" y="3337560"/>
             <a:ext cx="402336" cy="402336"/>
           </a:xfrm>
           <a:prstGeom prst="ellipse">
             <a:avLst/>
           </a:prstGeom>
           <a:solidFill>
-            <a:srgbClr val="26C5B8"/>
+            <a:srgbClr val="7BEAA9"/>
           </a:solidFill>
           <a:ln w="38100">
             <a:solidFill>
@@ -4680,14 +4848,14 @@
       </p:sp>
       <p:sp>
         <p:nvSpPr>
-          <p:cNvPr id="15" name="TextBox 14"/>
+          <p:cNvPr id="16" name="TextBox 15"/>
           <p:cNvSpPr txBox="1"/>
           <p:nvPr/>
         </p:nvSpPr>
         <p:spPr>
           <a:xfrm>
-            <a:off x="5086990" y="2468880"/>
-            <a:ext cx="2017715" cy="457200"/>
+            <a:off x="5050414" y="2697480"/>
+            <a:ext cx="2090867" cy="457200"/>
           </a:xfrm>
           <a:prstGeom prst="rect">
             <a:avLst/>
@@ -4708,7 +4876,7 @@
             <a:r>
               <a:rPr sz="1400" b="1" i="0">
                 <a:solidFill>
-                  <a:srgbClr val="26C5B8"/>
+                  <a:srgbClr val="7BEAA9"/>
                 </a:solidFill>
               </a:rPr>
               <a:t>6개월</a:t>
@@ -4718,14 +4886,14 @@
       </p:sp>
       <p:sp>
         <p:nvSpPr>
-          <p:cNvPr id="16" name="TextBox 15"/>
+          <p:cNvPr id="17" name="TextBox 16"/>
           <p:cNvSpPr txBox="1"/>
           <p:nvPr/>
         </p:nvSpPr>
         <p:spPr>
           <a:xfrm>
-            <a:off x="5132710" y="3657600"/>
-            <a:ext cx="1926275" cy="457200"/>
+            <a:off x="5096134" y="3886200"/>
+            <a:ext cx="1999427" cy="457200"/>
           </a:xfrm>
           <a:prstGeom prst="rect">
             <a:avLst/>
@@ -4746,7 +4914,7 @@
             <a:r>
               <a:rPr sz="1600" b="1" i="0">
                 <a:solidFill>
-                  <a:srgbClr val="115F59"/>
+                  <a:srgbClr val="274935"/>
                 </a:solidFill>
               </a:rPr>
               <a:t>뒤집기 성공</a:t>
@@ -4756,14 +4924,14 @@
       </p:sp>
       <p:sp>
         <p:nvSpPr>
-          <p:cNvPr id="17" name="TextBox 16"/>
+          <p:cNvPr id="18" name="TextBox 17"/>
           <p:cNvSpPr txBox="1"/>
           <p:nvPr/>
         </p:nvSpPr>
         <p:spPr>
           <a:xfrm>
-            <a:off x="5132710" y="4160520"/>
-            <a:ext cx="1926275" cy="1645920"/>
+            <a:off x="5096134" y="4389120"/>
+            <a:ext cx="1999427" cy="1645920"/>
           </a:xfrm>
           <a:prstGeom prst="rect">
             <a:avLst/>
@@ -4784,7 +4952,7 @@
             <a:r>
               <a:rPr sz="1300" b="0" i="0">
                 <a:solidFill>
-                  <a:srgbClr val="2B2B2B"/>
+                  <a:srgbClr val="26231F"/>
                 </a:solidFill>
               </a:rPr>
               <a:t>기억을 적어 주세요</a:t>
@@ -4794,20 +4962,20 @@
       </p:sp>
       <p:sp>
         <p:nvSpPr>
-          <p:cNvPr id="18" name="때 4"/>
+          <p:cNvPr id="19" name="때 4"/>
           <p:cNvSpPr/>
           <p:nvPr/>
         </p:nvSpPr>
         <p:spPr>
           <a:xfrm>
-            <a:off x="8003834" y="3108960"/>
+            <a:off x="8076986" y="3337560"/>
             <a:ext cx="402336" cy="402336"/>
           </a:xfrm>
           <a:prstGeom prst="ellipse">
             <a:avLst/>
           </a:prstGeom>
           <a:solidFill>
-            <a:srgbClr val="26C5B8"/>
+            <a:srgbClr val="7BEAA9"/>
           </a:solidFill>
           <a:ln w="38100">
             <a:solidFill>
@@ -4825,14 +4993,14 @@
       </p:sp>
       <p:sp>
         <p:nvSpPr>
-          <p:cNvPr id="19" name="TextBox 18"/>
+          <p:cNvPr id="20" name="TextBox 19"/>
           <p:cNvSpPr txBox="1"/>
           <p:nvPr/>
         </p:nvSpPr>
         <p:spPr>
           <a:xfrm>
-            <a:off x="7196145" y="2468880"/>
-            <a:ext cx="2017715" cy="457200"/>
+            <a:off x="7232721" y="2697480"/>
+            <a:ext cx="2090867" cy="457200"/>
           </a:xfrm>
           <a:prstGeom prst="rect">
             <a:avLst/>
@@ -4853,7 +5021,7 @@
             <a:r>
               <a:rPr sz="1400" b="1" i="0">
                 <a:solidFill>
-                  <a:srgbClr val="26C5B8"/>
+                  <a:srgbClr val="7BEAA9"/>
                 </a:solidFill>
               </a:rPr>
               <a:t>9개월</a:t>
@@ -4863,14 +5031,14 @@
       </p:sp>
       <p:sp>
         <p:nvSpPr>
-          <p:cNvPr id="20" name="TextBox 19"/>
+          <p:cNvPr id="21" name="TextBox 20"/>
           <p:cNvSpPr txBox="1"/>
           <p:nvPr/>
         </p:nvSpPr>
         <p:spPr>
           <a:xfrm>
-            <a:off x="7241865" y="3657600"/>
-            <a:ext cx="1926275" cy="457200"/>
+            <a:off x="7278441" y="3886200"/>
+            <a:ext cx="1999427" cy="457200"/>
           </a:xfrm>
           <a:prstGeom prst="rect">
             <a:avLst/>
@@ -4891,7 +5059,7 @@
             <a:r>
               <a:rPr sz="1600" b="1" i="0">
                 <a:solidFill>
-                  <a:srgbClr val="115F59"/>
+                  <a:srgbClr val="274935"/>
                 </a:solidFill>
               </a:rPr>
               <a:t>첫 이유식</a:t>
@@ -4901,14 +5069,14 @@
       </p:sp>
       <p:sp>
         <p:nvSpPr>
-          <p:cNvPr id="21" name="TextBox 20"/>
+          <p:cNvPr id="22" name="TextBox 21"/>
           <p:cNvSpPr txBox="1"/>
           <p:nvPr/>
         </p:nvSpPr>
         <p:spPr>
           <a:xfrm>
-            <a:off x="7241865" y="4160520"/>
-            <a:ext cx="1926275" cy="1645920"/>
+            <a:off x="7278441" y="4389120"/>
+            <a:ext cx="1999427" cy="1645920"/>
           </a:xfrm>
           <a:prstGeom prst="rect">
             <a:avLst/>
@@ -4929,7 +5097,7 @@
             <a:r>
               <a:rPr sz="1300" b="0" i="0">
                 <a:solidFill>
-                  <a:srgbClr val="2B2B2B"/>
+                  <a:srgbClr val="26231F"/>
                 </a:solidFill>
               </a:rPr>
               <a:t>기억을 적어 주세요</a:t>
@@ -4939,20 +5107,20 @@
       </p:sp>
       <p:sp>
         <p:nvSpPr>
-          <p:cNvPr id="22" name="때 5"/>
+          <p:cNvPr id="23" name="때 5"/>
           <p:cNvSpPr/>
           <p:nvPr/>
         </p:nvSpPr>
         <p:spPr>
           <a:xfrm>
-            <a:off x="10112989" y="3108960"/>
+            <a:off x="10259293" y="3337560"/>
             <a:ext cx="402336" cy="402336"/>
           </a:xfrm>
           <a:prstGeom prst="ellipse">
             <a:avLst/>
           </a:prstGeom>
           <a:solidFill>
-            <a:srgbClr val="26C5B8"/>
+            <a:srgbClr val="7BEAA9"/>
           </a:solidFill>
           <a:ln w="38100">
             <a:solidFill>
@@ -4970,14 +5138,14 @@
       </p:sp>
       <p:sp>
         <p:nvSpPr>
-          <p:cNvPr id="23" name="TextBox 22"/>
+          <p:cNvPr id="24" name="TextBox 23"/>
           <p:cNvSpPr txBox="1"/>
           <p:nvPr/>
         </p:nvSpPr>
         <p:spPr>
           <a:xfrm>
-            <a:off x="9305300" y="2468880"/>
-            <a:ext cx="2017715" cy="457200"/>
+            <a:off x="9415028" y="2697480"/>
+            <a:ext cx="2090867" cy="457200"/>
           </a:xfrm>
           <a:prstGeom prst="rect">
             <a:avLst/>
@@ -4998,7 +5166,7 @@
             <a:r>
               <a:rPr sz="1400" b="1" i="0">
                 <a:solidFill>
-                  <a:srgbClr val="26C5B8"/>
+                  <a:srgbClr val="7BEAA9"/>
                 </a:solidFill>
               </a:rPr>
               <a:t>12개월</a:t>
@@ -5008,14 +5176,14 @@
       </p:sp>
       <p:sp>
         <p:nvSpPr>
-          <p:cNvPr id="24" name="TextBox 23"/>
+          <p:cNvPr id="25" name="TextBox 24"/>
           <p:cNvSpPr txBox="1"/>
           <p:nvPr/>
         </p:nvSpPr>
         <p:spPr>
           <a:xfrm>
-            <a:off x="9351020" y="3657600"/>
-            <a:ext cx="1926275" cy="457200"/>
+            <a:off x="9460748" y="3886200"/>
+            <a:ext cx="1999427" cy="457200"/>
           </a:xfrm>
           <a:prstGeom prst="rect">
             <a:avLst/>
@@ -5036,7 +5204,7 @@
             <a:r>
               <a:rPr sz="1600" b="1" i="0">
                 <a:solidFill>
-                  <a:srgbClr val="115F59"/>
+                  <a:srgbClr val="274935"/>
                 </a:solidFill>
               </a:rPr>
               <a:t>첫 걸음</a:t>
@@ -5046,14 +5214,14 @@
       </p:sp>
       <p:sp>
         <p:nvSpPr>
-          <p:cNvPr id="25" name="TextBox 24"/>
+          <p:cNvPr id="26" name="TextBox 25"/>
           <p:cNvSpPr txBox="1"/>
           <p:nvPr/>
         </p:nvSpPr>
         <p:spPr>
           <a:xfrm>
-            <a:off x="9351020" y="4160520"/>
-            <a:ext cx="1926275" cy="1645920"/>
+            <a:off x="9460748" y="4389120"/>
+            <a:ext cx="1999427" cy="1645920"/>
           </a:xfrm>
           <a:prstGeom prst="rect">
             <a:avLst/>
@@ -5074,7 +5242,7 @@
             <a:r>
               <a:rPr sz="1300" b="0" i="0">
                 <a:solidFill>
-                  <a:srgbClr val="2B2B2B"/>
+                  <a:srgbClr val="26231F"/>
                 </a:solidFill>
               </a:rPr>
               <a:t>기억을 적어 주세요</a:t>
@@ -5096,7 +5264,7 @@
     <p:bg>
       <p:bgPr>
         <a:solidFill>
-          <a:srgbClr val="EEFCFB"/>
+          <a:srgbClr val="EAFDF2"/>
         </a:solidFill>
         <a:effectLst/>
       </p:bgPr>
@@ -5116,46 +5284,84 @@
         </p:nvSpPr>
         <p:spPr>
           <a:xfrm>
-            <a:off x="256032" y="256032"/>
-            <a:ext cx="11679631" cy="6345936"/>
+            <a:off x="10180015" y="-1645920"/>
+            <a:ext cx="3474720" cy="3474720"/>
+          </a:xfrm>
+          <a:prstGeom prst="ellipse">
+            <a:avLst/>
+          </a:prstGeom>
+          <a:solidFill>
+            <a:srgbClr val="A5F3C5"/>
+          </a:solidFill>
+          <a:ln>
+            <a:noFill/>
+          </a:ln>
+        </p:spPr>
+        <p:txBody>
+          <a:bodyPr rtlCol="0" anchor="ctr"/>
+          <a:lstStyle/>
+          <a:p>
+            <a:pPr algn="ctr"/>
+          </a:p>
+        </p:txBody>
+      </p:sp>
+      <p:sp>
+        <p:nvSpPr>
+          <p:cNvPr id="4" name="상단 라벨"/>
+          <p:cNvSpPr txBox="1"/>
+          <p:nvPr/>
+        </p:nvSpPr>
+        <p:spPr>
+          <a:xfrm>
+            <a:off x="640080" y="274320"/>
+            <a:ext cx="5486400" cy="274320"/>
           </a:xfrm>
           <a:prstGeom prst="rect">
             <a:avLst/>
           </a:prstGeom>
           <a:noFill/>
-          <a:ln w="28575">
-            <a:solidFill>
-              <a:srgbClr val="26C5B8"/>
-            </a:solidFill>
-          </a:ln>
-        </p:spPr>
-        <p:txBody>
-          <a:bodyPr rtlCol="0" anchor="ctr"/>
-          <a:lstStyle/>
-          <a:p>
-            <a:pPr algn="ctr"/>
-          </a:p>
-        </p:txBody>
-      </p:sp>
-      <p:sp>
-        <p:nvSpPr>
-          <p:cNvPr id="4" name="장식"/>
+        </p:spPr>
+        <p:txBody>
+          <a:bodyPr wrap="square" lIns="54864" rIns="54864" tIns="27432" bIns="27432" anchor="ctr">
+            <a:noAutofit/>
+          </a:bodyPr>
+          <a:lstStyle/>
+          <a:p>
+            <a:pPr algn="l">
+              <a:lnSpc>
+                <a:spcPct val="115000"/>
+              </a:lnSpc>
+            </a:pPr>
+            <a:r>
+              <a:rPr sz="900" b="1" i="0" spc="250">
+                <a:solidFill>
+                  <a:srgbClr val="26231F"/>
+                </a:solidFill>
+              </a:rPr>
+              <a:t>FIRST BIRTHDAY</a:t>
+            </a:r>
+          </a:p>
+        </p:txBody>
+      </p:sp>
+      <p:sp>
+        <p:nvSpPr>
+          <p:cNvPr id="5" name="포인트"/>
           <p:cNvSpPr/>
           <p:nvPr/>
         </p:nvSpPr>
         <p:spPr>
-          <a:xfrm>
-            <a:off x="384048" y="384048"/>
-            <a:ext cx="11423599" cy="6089904"/>
-          </a:xfrm>
-          <a:prstGeom prst="rect">
+          <a:xfrm rot="18900000">
+            <a:off x="11048695" y="502919"/>
+            <a:ext cx="274320" cy="274320"/>
+          </a:xfrm>
+          <a:prstGeom prst="teardrop">
             <a:avLst/>
           </a:prstGeom>
-          <a:noFill/>
-          <a:ln w="9525">
-            <a:solidFill>
-              <a:srgbClr val="D1FAF7"/>
-            </a:solidFill>
+          <a:solidFill>
+            <a:srgbClr val="FFFFFF"/>
+          </a:solidFill>
+          <a:ln>
+            <a:noFill/>
           </a:ln>
         </p:spPr>
         <p:txBody>
@@ -5178,8 +5384,8 @@
         </p:nvSpPr>
         <p:spPr>
           <a:xfrm>
-            <a:off x="822960" y="548640"/>
-            <a:ext cx="9265615" cy="822960"/>
+            <a:off x="640080" y="658368"/>
+            <a:ext cx="9082735" cy="868680"/>
           </a:xfrm>
         </p:spPr>
         <p:txBody>
@@ -5196,7 +5402,7 @@
             <a:r>
               <a:rPr sz="3000" b="1" i="0">
                 <a:solidFill>
-                  <a:srgbClr val="115F59"/>
+                  <a:srgbClr val="26231F"/>
                 </a:solidFill>
               </a:rPr>
               <a:t>키와 몸무게</a:t>
@@ -5206,15 +5412,15 @@
       </p:sp>
       <p:graphicFrame>
         <p:nvGraphicFramePr>
-          <p:cNvPr id="5" name="표"/>
+          <p:cNvPr id="6" name="표"/>
           <p:cNvGraphicFramePr>
             <a:graphicFrameLocks noGrp="1"/>
           </p:cNvGraphicFramePr>
           <p:nvPr/>
         </p:nvGraphicFramePr>
         <p:xfrm>
-          <a:off x="822960" y="1554480"/>
-          <a:ext cx="10545775" cy="3291840"/>
+          <a:off x="640080" y="1783080"/>
+          <a:ext cx="10911535" cy="3291840"/>
         </p:xfrm>
         <a:graphic>
           <a:graphicData uri="http://schemas.openxmlformats.org/drawingml/2006/table">
@@ -5223,11 +5429,11 @@
                 <a:tableStyleId>{5C22544A-7EE6-4342-B048-85BDC9FD1C3A}</a:tableStyleId>
               </a:tblPr>
               <a:tblGrid>
-                <a:gridCol w="2109155"/>
-                <a:gridCol w="2109155"/>
-                <a:gridCol w="2109155"/>
-                <a:gridCol w="2109155"/>
-                <a:gridCol w="2109155"/>
+                <a:gridCol w="2182307"/>
+                <a:gridCol w="2182307"/>
+                <a:gridCol w="2182307"/>
+                <a:gridCol w="2182307"/>
+                <a:gridCol w="2182307"/>
               </a:tblGrid>
               <a:tr h="822960">
                 <a:tc>
@@ -5239,7 +5445,7 @@
                       <a:r>
                         <a:rPr sz="1600" b="1">
                           <a:solidFill>
-                            <a:srgbClr val="FFFFFF"/>
+                            <a:srgbClr val="26231F"/>
                           </a:solidFill>
                         </a:rPr>
                         <a:t/>
@@ -5249,30 +5455,30 @@
                   <a:tcPr anchor="ctr" marL="73152" marR="73152">
                     <a:lnL w="9525" cap="flat" cmpd="sng" algn="ctr">
                       <a:solidFill>
-                        <a:srgbClr val="26C5B8"/>
+                        <a:srgbClr val="7BEAA9"/>
                       </a:solidFill>
                       <a:prstDash val="solid"/>
                     </a:lnL>
                     <a:lnR w="9525" cap="flat" cmpd="sng" algn="ctr">
                       <a:solidFill>
-                        <a:srgbClr val="26C5B8"/>
+                        <a:srgbClr val="7BEAA9"/>
                       </a:solidFill>
                       <a:prstDash val="solid"/>
                     </a:lnR>
                     <a:lnT w="9525" cap="flat" cmpd="sng" algn="ctr">
                       <a:solidFill>
-                        <a:srgbClr val="26C5B8"/>
+                        <a:srgbClr val="7BEAA9"/>
                       </a:solidFill>
                       <a:prstDash val="solid"/>
                     </a:lnT>
                     <a:lnB w="9525" cap="flat" cmpd="sng" algn="ctr">
                       <a:solidFill>
-                        <a:srgbClr val="26C5B8"/>
+                        <a:srgbClr val="7BEAA9"/>
                       </a:solidFill>
                       <a:prstDash val="solid"/>
                     </a:lnB>
                     <a:solidFill>
-                      <a:srgbClr val="26C5B8"/>
+                      <a:srgbClr val="7BEAA9"/>
                     </a:solidFill>
                   </a:tcPr>
                 </a:tc>
@@ -5285,7 +5491,7 @@
                       <a:r>
                         <a:rPr sz="1600" b="1">
                           <a:solidFill>
-                            <a:srgbClr val="FFFFFF"/>
+                            <a:srgbClr val="26231F"/>
                           </a:solidFill>
                         </a:rPr>
                         <a:t>3개월</a:t>
@@ -5295,30 +5501,30 @@
                   <a:tcPr anchor="ctr" marL="73152" marR="73152">
                     <a:lnL w="9525" cap="flat" cmpd="sng" algn="ctr">
                       <a:solidFill>
-                        <a:srgbClr val="26C5B8"/>
+                        <a:srgbClr val="7BEAA9"/>
                       </a:solidFill>
                       <a:prstDash val="solid"/>
                     </a:lnL>
                     <a:lnR w="9525" cap="flat" cmpd="sng" algn="ctr">
                       <a:solidFill>
-                        <a:srgbClr val="26C5B8"/>
+                        <a:srgbClr val="7BEAA9"/>
                       </a:solidFill>
                       <a:prstDash val="solid"/>
                     </a:lnR>
                     <a:lnT w="9525" cap="flat" cmpd="sng" algn="ctr">
                       <a:solidFill>
-                        <a:srgbClr val="26C5B8"/>
+                        <a:srgbClr val="7BEAA9"/>
                       </a:solidFill>
                       <a:prstDash val="solid"/>
                     </a:lnT>
                     <a:lnB w="9525" cap="flat" cmpd="sng" algn="ctr">
                       <a:solidFill>
-                        <a:srgbClr val="26C5B8"/>
+                        <a:srgbClr val="7BEAA9"/>
                       </a:solidFill>
                       <a:prstDash val="solid"/>
                     </a:lnB>
                     <a:solidFill>
-                      <a:srgbClr val="26C5B8"/>
+                      <a:srgbClr val="7BEAA9"/>
                     </a:solidFill>
                   </a:tcPr>
                 </a:tc>
@@ -5331,7 +5537,7 @@
                       <a:r>
                         <a:rPr sz="1600" b="1">
                           <a:solidFill>
-                            <a:srgbClr val="FFFFFF"/>
+                            <a:srgbClr val="26231F"/>
                           </a:solidFill>
                         </a:rPr>
                         <a:t>6개월</a:t>
@@ -5341,30 +5547,30 @@
                   <a:tcPr anchor="ctr" marL="73152" marR="73152">
                     <a:lnL w="9525" cap="flat" cmpd="sng" algn="ctr">
                       <a:solidFill>
-                        <a:srgbClr val="26C5B8"/>
+                        <a:srgbClr val="7BEAA9"/>
                       </a:solidFill>
                       <a:prstDash val="solid"/>
                     </a:lnL>
                     <a:lnR w="9525" cap="flat" cmpd="sng" algn="ctr">
                       <a:solidFill>
-                        <a:srgbClr val="26C5B8"/>
+                        <a:srgbClr val="7BEAA9"/>
                       </a:solidFill>
                       <a:prstDash val="solid"/>
                     </a:lnR>
                     <a:lnT w="9525" cap="flat" cmpd="sng" algn="ctr">
                       <a:solidFill>
-                        <a:srgbClr val="26C5B8"/>
+                        <a:srgbClr val="7BEAA9"/>
                       </a:solidFill>
                       <a:prstDash val="solid"/>
                     </a:lnT>
                     <a:lnB w="9525" cap="flat" cmpd="sng" algn="ctr">
                       <a:solidFill>
-                        <a:srgbClr val="26C5B8"/>
+                        <a:srgbClr val="7BEAA9"/>
                       </a:solidFill>
                       <a:prstDash val="solid"/>
                     </a:lnB>
                     <a:solidFill>
-                      <a:srgbClr val="26C5B8"/>
+                      <a:srgbClr val="7BEAA9"/>
                     </a:solidFill>
                   </a:tcPr>
                 </a:tc>
@@ -5377,7 +5583,7 @@
                       <a:r>
                         <a:rPr sz="1600" b="1">
                           <a:solidFill>
-                            <a:srgbClr val="FFFFFF"/>
+                            <a:srgbClr val="26231F"/>
                           </a:solidFill>
                         </a:rPr>
                         <a:t>9개월</a:t>
@@ -5387,30 +5593,30 @@
                   <a:tcPr anchor="ctr" marL="73152" marR="73152">
                     <a:lnL w="9525" cap="flat" cmpd="sng" algn="ctr">
                       <a:solidFill>
-                        <a:srgbClr val="26C5B8"/>
+                        <a:srgbClr val="7BEAA9"/>
                       </a:solidFill>
                       <a:prstDash val="solid"/>
                     </a:lnL>
                     <a:lnR w="9525" cap="flat" cmpd="sng" algn="ctr">
                       <a:solidFill>
-                        <a:srgbClr val="26C5B8"/>
+                        <a:srgbClr val="7BEAA9"/>
                       </a:solidFill>
                       <a:prstDash val="solid"/>
                     </a:lnR>
                     <a:lnT w="9525" cap="flat" cmpd="sng" algn="ctr">
                       <a:solidFill>
-                        <a:srgbClr val="26C5B8"/>
+                        <a:srgbClr val="7BEAA9"/>
                       </a:solidFill>
                       <a:prstDash val="solid"/>
                     </a:lnT>
                     <a:lnB w="9525" cap="flat" cmpd="sng" algn="ctr">
                       <a:solidFill>
-                        <a:srgbClr val="26C5B8"/>
+                        <a:srgbClr val="7BEAA9"/>
                       </a:solidFill>
                       <a:prstDash val="solid"/>
                     </a:lnB>
                     <a:solidFill>
-                      <a:srgbClr val="26C5B8"/>
+                      <a:srgbClr val="7BEAA9"/>
                     </a:solidFill>
                   </a:tcPr>
                 </a:tc>
@@ -5423,7 +5629,7 @@
                       <a:r>
                         <a:rPr sz="1600" b="1">
                           <a:solidFill>
-                            <a:srgbClr val="FFFFFF"/>
+                            <a:srgbClr val="26231F"/>
                           </a:solidFill>
                         </a:rPr>
                         <a:t>12개월</a:t>
@@ -5433,30 +5639,30 @@
                   <a:tcPr anchor="ctr" marL="73152" marR="73152">
                     <a:lnL w="9525" cap="flat" cmpd="sng" algn="ctr">
                       <a:solidFill>
-                        <a:srgbClr val="26C5B8"/>
+                        <a:srgbClr val="7BEAA9"/>
                       </a:solidFill>
                       <a:prstDash val="solid"/>
                     </a:lnL>
                     <a:lnR w="9525" cap="flat" cmpd="sng" algn="ctr">
                       <a:solidFill>
-                        <a:srgbClr val="26C5B8"/>
+                        <a:srgbClr val="7BEAA9"/>
                       </a:solidFill>
                       <a:prstDash val="solid"/>
                     </a:lnR>
                     <a:lnT w="9525" cap="flat" cmpd="sng" algn="ctr">
                       <a:solidFill>
-                        <a:srgbClr val="26C5B8"/>
+                        <a:srgbClr val="7BEAA9"/>
                       </a:solidFill>
                       <a:prstDash val="solid"/>
                     </a:lnT>
                     <a:lnB w="9525" cap="flat" cmpd="sng" algn="ctr">
                       <a:solidFill>
-                        <a:srgbClr val="26C5B8"/>
+                        <a:srgbClr val="7BEAA9"/>
                       </a:solidFill>
                       <a:prstDash val="solid"/>
                     </a:lnB>
                     <a:solidFill>
-                      <a:srgbClr val="26C5B8"/>
+                      <a:srgbClr val="7BEAA9"/>
                     </a:solidFill>
                   </a:tcPr>
                 </a:tc>
@@ -5471,7 +5677,7 @@
                       <a:r>
                         <a:rPr sz="1600" b="1">
                           <a:solidFill>
-                            <a:srgbClr val="115F59"/>
+                            <a:srgbClr val="274935"/>
                           </a:solidFill>
                         </a:rPr>
                         <a:t>키(cm)</a:t>
@@ -5481,30 +5687,30 @@
                   <a:tcPr anchor="ctr" marL="73152" marR="73152">
                     <a:lnL w="9525" cap="flat" cmpd="sng" algn="ctr">
                       <a:solidFill>
-                        <a:srgbClr val="D1FAF7"/>
+                        <a:srgbClr val="D1FAE2"/>
                       </a:solidFill>
                       <a:prstDash val="solid"/>
                     </a:lnL>
                     <a:lnR w="9525" cap="flat" cmpd="sng" algn="ctr">
                       <a:solidFill>
-                        <a:srgbClr val="D1FAF7"/>
+                        <a:srgbClr val="D1FAE2"/>
                       </a:solidFill>
                       <a:prstDash val="solid"/>
                     </a:lnR>
                     <a:lnT w="9525" cap="flat" cmpd="sng" algn="ctr">
                       <a:solidFill>
-                        <a:srgbClr val="D1FAF7"/>
+                        <a:srgbClr val="D1FAE2"/>
                       </a:solidFill>
                       <a:prstDash val="solid"/>
                     </a:lnT>
                     <a:lnB w="9525" cap="flat" cmpd="sng" algn="ctr">
                       <a:solidFill>
-                        <a:srgbClr val="D1FAF7"/>
+                        <a:srgbClr val="D1FAE2"/>
                       </a:solidFill>
                       <a:prstDash val="solid"/>
                     </a:lnB>
                     <a:solidFill>
-                      <a:srgbClr val="D1FAF7"/>
+                      <a:srgbClr val="D1FAE2"/>
                     </a:solidFill>
                   </a:tcPr>
                 </a:tc>
@@ -5517,7 +5723,7 @@
                       <a:r>
                         <a:rPr sz="1600" b="0">
                           <a:solidFill>
-                            <a:srgbClr val="2B2B2B"/>
+                            <a:srgbClr val="26231F"/>
                           </a:solidFill>
                         </a:rPr>
                         <a:t/>
@@ -5527,25 +5733,25 @@
                   <a:tcPr anchor="ctr" marL="73152" marR="73152">
                     <a:lnL w="9525" cap="flat" cmpd="sng" algn="ctr">
                       <a:solidFill>
-                        <a:srgbClr val="D1FAF7"/>
+                        <a:srgbClr val="D1FAE2"/>
                       </a:solidFill>
                       <a:prstDash val="solid"/>
                     </a:lnL>
                     <a:lnR w="9525" cap="flat" cmpd="sng" algn="ctr">
                       <a:solidFill>
-                        <a:srgbClr val="D1FAF7"/>
+                        <a:srgbClr val="D1FAE2"/>
                       </a:solidFill>
                       <a:prstDash val="solid"/>
                     </a:lnR>
                     <a:lnT w="9525" cap="flat" cmpd="sng" algn="ctr">
                       <a:solidFill>
-                        <a:srgbClr val="D1FAF7"/>
+                        <a:srgbClr val="D1FAE2"/>
                       </a:solidFill>
                       <a:prstDash val="solid"/>
                     </a:lnT>
                     <a:lnB w="9525" cap="flat" cmpd="sng" algn="ctr">
                       <a:solidFill>
-                        <a:srgbClr val="D1FAF7"/>
+                        <a:srgbClr val="D1FAE2"/>
                       </a:solidFill>
                       <a:prstDash val="solid"/>
                     </a:lnB>
@@ -5563,7 +5769,7 @@
                       <a:r>
                         <a:rPr sz="1600" b="0">
                           <a:solidFill>
-                            <a:srgbClr val="2B2B2B"/>
+                            <a:srgbClr val="26231F"/>
                           </a:solidFill>
                         </a:rPr>
                         <a:t/>
@@ -5573,25 +5779,25 @@
                   <a:tcPr anchor="ctr" marL="73152" marR="73152">
                     <a:lnL w="9525" cap="flat" cmpd="sng" algn="ctr">
                       <a:solidFill>
-                        <a:srgbClr val="D1FAF7"/>
+                        <a:srgbClr val="D1FAE2"/>
                       </a:solidFill>
                       <a:prstDash val="solid"/>
                     </a:lnL>
                     <a:lnR w="9525" cap="flat" cmpd="sng" algn="ctr">
                       <a:solidFill>
-                        <a:srgbClr val="D1FAF7"/>
+                        <a:srgbClr val="D1FAE2"/>
                       </a:solidFill>
                       <a:prstDash val="solid"/>
                     </a:lnR>
                     <a:lnT w="9525" cap="flat" cmpd="sng" algn="ctr">
                       <a:solidFill>
-                        <a:srgbClr val="D1FAF7"/>
+                        <a:srgbClr val="D1FAE2"/>
                       </a:solidFill>
                       <a:prstDash val="solid"/>
                     </a:lnT>
                     <a:lnB w="9525" cap="flat" cmpd="sng" algn="ctr">
                       <a:solidFill>
-                        <a:srgbClr val="D1FAF7"/>
+                        <a:srgbClr val="D1FAE2"/>
                       </a:solidFill>
                       <a:prstDash val="solid"/>
                     </a:lnB>
@@ -5609,7 +5815,7 @@
                       <a:r>
                         <a:rPr sz="1600" b="0">
                           <a:solidFill>
-                            <a:srgbClr val="2B2B2B"/>
+                            <a:srgbClr val="26231F"/>
                           </a:solidFill>
                         </a:rPr>
                         <a:t/>
@@ -5619,25 +5825,25 @@
                   <a:tcPr anchor="ctr" marL="73152" marR="73152">
                     <a:lnL w="9525" cap="flat" cmpd="sng" algn="ctr">
                       <a:solidFill>
-                        <a:srgbClr val="D1FAF7"/>
+                        <a:srgbClr val="D1FAE2"/>
                       </a:solidFill>
                       <a:prstDash val="solid"/>
                     </a:lnL>
                     <a:lnR w="9525" cap="flat" cmpd="sng" algn="ctr">
                       <a:solidFill>
-                        <a:srgbClr val="D1FAF7"/>
+                        <a:srgbClr val="D1FAE2"/>
                       </a:solidFill>
                       <a:prstDash val="solid"/>
                     </a:lnR>
                     <a:lnT w="9525" cap="flat" cmpd="sng" algn="ctr">
                       <a:solidFill>
-                        <a:srgbClr val="D1FAF7"/>
+                        <a:srgbClr val="D1FAE2"/>
                       </a:solidFill>
                       <a:prstDash val="solid"/>
                     </a:lnT>
                     <a:lnB w="9525" cap="flat" cmpd="sng" algn="ctr">
                       <a:solidFill>
-                        <a:srgbClr val="D1FAF7"/>
+                        <a:srgbClr val="D1FAE2"/>
                       </a:solidFill>
                       <a:prstDash val="solid"/>
                     </a:lnB>
@@ -5655,7 +5861,7 @@
                       <a:r>
                         <a:rPr sz="1600" b="0">
                           <a:solidFill>
-                            <a:srgbClr val="2B2B2B"/>
+                            <a:srgbClr val="26231F"/>
                           </a:solidFill>
                         </a:rPr>
                         <a:t/>
@@ -5665,25 +5871,25 @@
                   <a:tcPr anchor="ctr" marL="73152" marR="73152">
                     <a:lnL w="9525" cap="flat" cmpd="sng" algn="ctr">
                       <a:solidFill>
-                        <a:srgbClr val="D1FAF7"/>
+                        <a:srgbClr val="D1FAE2"/>
                       </a:solidFill>
                       <a:prstDash val="solid"/>
                     </a:lnL>
                     <a:lnR w="9525" cap="flat" cmpd="sng" algn="ctr">
                       <a:solidFill>
-                        <a:srgbClr val="D1FAF7"/>
+                        <a:srgbClr val="D1FAE2"/>
                       </a:solidFill>
                       <a:prstDash val="solid"/>
                     </a:lnR>
                     <a:lnT w="9525" cap="flat" cmpd="sng" algn="ctr">
                       <a:solidFill>
-                        <a:srgbClr val="D1FAF7"/>
+                        <a:srgbClr val="D1FAE2"/>
                       </a:solidFill>
                       <a:prstDash val="solid"/>
                     </a:lnT>
                     <a:lnB w="9525" cap="flat" cmpd="sng" algn="ctr">
                       <a:solidFill>
-                        <a:srgbClr val="D1FAF7"/>
+                        <a:srgbClr val="D1FAE2"/>
                       </a:solidFill>
                       <a:prstDash val="solid"/>
                     </a:lnB>
@@ -5703,7 +5909,7 @@
                       <a:r>
                         <a:rPr sz="1600" b="1">
                           <a:solidFill>
-                            <a:srgbClr val="115F59"/>
+                            <a:srgbClr val="274935"/>
                           </a:solidFill>
                         </a:rPr>
                         <a:t>몸무게(kg)</a:t>
@@ -5713,30 +5919,30 @@
                   <a:tcPr anchor="ctr" marL="73152" marR="73152">
                     <a:lnL w="9525" cap="flat" cmpd="sng" algn="ctr">
                       <a:solidFill>
-                        <a:srgbClr val="D1FAF7"/>
+                        <a:srgbClr val="D1FAE2"/>
                       </a:solidFill>
                       <a:prstDash val="solid"/>
                     </a:lnL>
                     <a:lnR w="9525" cap="flat" cmpd="sng" algn="ctr">
                       <a:solidFill>
-                        <a:srgbClr val="D1FAF7"/>
+                        <a:srgbClr val="D1FAE2"/>
                       </a:solidFill>
                       <a:prstDash val="solid"/>
                     </a:lnR>
                     <a:lnT w="9525" cap="flat" cmpd="sng" algn="ctr">
                       <a:solidFill>
-                        <a:srgbClr val="D1FAF7"/>
+                        <a:srgbClr val="D1FAE2"/>
                       </a:solidFill>
                       <a:prstDash val="solid"/>
                     </a:lnT>
                     <a:lnB w="9525" cap="flat" cmpd="sng" algn="ctr">
                       <a:solidFill>
-                        <a:srgbClr val="D1FAF7"/>
+                        <a:srgbClr val="D1FAE2"/>
                       </a:solidFill>
                       <a:prstDash val="solid"/>
                     </a:lnB>
                     <a:solidFill>
-                      <a:srgbClr val="D1FAF7"/>
+                      <a:srgbClr val="D1FAE2"/>
                     </a:solidFill>
                   </a:tcPr>
                 </a:tc>
@@ -5749,7 +5955,7 @@
                       <a:r>
                         <a:rPr sz="1600" b="0">
                           <a:solidFill>
-                            <a:srgbClr val="2B2B2B"/>
+                            <a:srgbClr val="26231F"/>
                           </a:solidFill>
                         </a:rPr>
                         <a:t/>
@@ -5759,30 +5965,30 @@
                   <a:tcPr anchor="ctr" marL="73152" marR="73152">
                     <a:lnL w="9525" cap="flat" cmpd="sng" algn="ctr">
                       <a:solidFill>
-                        <a:srgbClr val="D1FAF7"/>
+                        <a:srgbClr val="D1FAE2"/>
                       </a:solidFill>
                       <a:prstDash val="solid"/>
                     </a:lnL>
                     <a:lnR w="9525" cap="flat" cmpd="sng" algn="ctr">
                       <a:solidFill>
-                        <a:srgbClr val="D1FAF7"/>
+                        <a:srgbClr val="D1FAE2"/>
                       </a:solidFill>
                       <a:prstDash val="solid"/>
                     </a:lnR>
                     <a:lnT w="9525" cap="flat" cmpd="sng" algn="ctr">
                       <a:solidFill>
-                        <a:srgbClr val="D1FAF7"/>
+                        <a:srgbClr val="D1FAE2"/>
                       </a:solidFill>
                       <a:prstDash val="solid"/>
                     </a:lnT>
                     <a:lnB w="9525" cap="flat" cmpd="sng" algn="ctr">
                       <a:solidFill>
-                        <a:srgbClr val="D1FAF7"/>
+                        <a:srgbClr val="D1FAE2"/>
                       </a:solidFill>
                       <a:prstDash val="solid"/>
                     </a:lnB>
                     <a:solidFill>
-                      <a:srgbClr val="EEFCFB"/>
+                      <a:srgbClr val="EAFDF2"/>
                     </a:solidFill>
                   </a:tcPr>
                 </a:tc>
@@ -5795,7 +6001,7 @@
                       <a:r>
                         <a:rPr sz="1600" b="0">
                           <a:solidFill>
-                            <a:srgbClr val="2B2B2B"/>
+                            <a:srgbClr val="26231F"/>
                           </a:solidFill>
                         </a:rPr>
                         <a:t/>
@@ -5805,30 +6011,30 @@
                   <a:tcPr anchor="ctr" marL="73152" marR="73152">
                     <a:lnL w="9525" cap="flat" cmpd="sng" algn="ctr">
                       <a:solidFill>
-                        <a:srgbClr val="D1FAF7"/>
+                        <a:srgbClr val="D1FAE2"/>
                       </a:solidFill>
                       <a:prstDash val="solid"/>
                     </a:lnL>
                     <a:lnR w="9525" cap="flat" cmpd="sng" algn="ctr">
                       <a:solidFill>
-                        <a:srgbClr val="D1FAF7"/>
+                        <a:srgbClr val="D1FAE2"/>
                       </a:solidFill>
                       <a:prstDash val="solid"/>
                     </a:lnR>
                     <a:lnT w="9525" cap="flat" cmpd="sng" algn="ctr">
                       <a:solidFill>
-                        <a:srgbClr val="D1FAF7"/>
+                        <a:srgbClr val="D1FAE2"/>
                       </a:solidFill>
                       <a:prstDash val="solid"/>
                     </a:lnT>
                     <a:lnB w="9525" cap="flat" cmpd="sng" algn="ctr">
                       <a:solidFill>
-                        <a:srgbClr val="D1FAF7"/>
+                        <a:srgbClr val="D1FAE2"/>
                       </a:solidFill>
                       <a:prstDash val="solid"/>
                     </a:lnB>
                     <a:solidFill>
-                      <a:srgbClr val="EEFCFB"/>
+                      <a:srgbClr val="EAFDF2"/>
                     </a:solidFill>
                   </a:tcPr>
                 </a:tc>
@@ -5841,7 +6047,7 @@
                       <a:r>
                         <a:rPr sz="1600" b="0">
                           <a:solidFill>
-                            <a:srgbClr val="2B2B2B"/>
+                            <a:srgbClr val="26231F"/>
                           </a:solidFill>
                         </a:rPr>
                         <a:t/>
@@ -5851,30 +6057,30 @@
                   <a:tcPr anchor="ctr" marL="73152" marR="73152">
                     <a:lnL w="9525" cap="flat" cmpd="sng" algn="ctr">
                       <a:solidFill>
-                        <a:srgbClr val="D1FAF7"/>
+                        <a:srgbClr val="D1FAE2"/>
                       </a:solidFill>
                       <a:prstDash val="solid"/>
                     </a:lnL>
                     <a:lnR w="9525" cap="flat" cmpd="sng" algn="ctr">
                       <a:solidFill>
-                        <a:srgbClr val="D1FAF7"/>
+                        <a:srgbClr val="D1FAE2"/>
                       </a:solidFill>
                       <a:prstDash val="solid"/>
                     </a:lnR>
                     <a:lnT w="9525" cap="flat" cmpd="sng" algn="ctr">
                       <a:solidFill>
-                        <a:srgbClr val="D1FAF7"/>
+                        <a:srgbClr val="D1FAE2"/>
                       </a:solidFill>
                       <a:prstDash val="solid"/>
                     </a:lnT>
                     <a:lnB w="9525" cap="flat" cmpd="sng" algn="ctr">
                       <a:solidFill>
-                        <a:srgbClr val="D1FAF7"/>
+                        <a:srgbClr val="D1FAE2"/>
                       </a:solidFill>
                       <a:prstDash val="solid"/>
                     </a:lnB>
                     <a:solidFill>
-                      <a:srgbClr val="EEFCFB"/>
+                      <a:srgbClr val="EAFDF2"/>
                     </a:solidFill>
                   </a:tcPr>
                 </a:tc>
@@ -5887,7 +6093,7 @@
                       <a:r>
                         <a:rPr sz="1600" b="0">
                           <a:solidFill>
-                            <a:srgbClr val="2B2B2B"/>
+                            <a:srgbClr val="26231F"/>
                           </a:solidFill>
                         </a:rPr>
                         <a:t/>
@@ -5897,30 +6103,30 @@
                   <a:tcPr anchor="ctr" marL="73152" marR="73152">
                     <a:lnL w="9525" cap="flat" cmpd="sng" algn="ctr">
                       <a:solidFill>
-                        <a:srgbClr val="D1FAF7"/>
+                        <a:srgbClr val="D1FAE2"/>
                       </a:solidFill>
                       <a:prstDash val="solid"/>
                     </a:lnL>
                     <a:lnR w="9525" cap="flat" cmpd="sng" algn="ctr">
                       <a:solidFill>
-                        <a:srgbClr val="D1FAF7"/>
+                        <a:srgbClr val="D1FAE2"/>
                       </a:solidFill>
                       <a:prstDash val="solid"/>
                     </a:lnR>
                     <a:lnT w="9525" cap="flat" cmpd="sng" algn="ctr">
                       <a:solidFill>
-                        <a:srgbClr val="D1FAF7"/>
+                        <a:srgbClr val="D1FAE2"/>
                       </a:solidFill>
                       <a:prstDash val="solid"/>
                     </a:lnT>
                     <a:lnB w="9525" cap="flat" cmpd="sng" algn="ctr">
                       <a:solidFill>
-                        <a:srgbClr val="D1FAF7"/>
+                        <a:srgbClr val="D1FAE2"/>
                       </a:solidFill>
                       <a:prstDash val="solid"/>
                     </a:lnB>
                     <a:solidFill>
-                      <a:srgbClr val="EEFCFB"/>
+                      <a:srgbClr val="EAFDF2"/>
                     </a:solidFill>
                   </a:tcPr>
                 </a:tc>
@@ -5935,7 +6141,7 @@
                       <a:r>
                         <a:rPr sz="1600" b="1">
                           <a:solidFill>
-                            <a:srgbClr val="115F59"/>
+                            <a:srgbClr val="274935"/>
                           </a:solidFill>
                         </a:rPr>
                         <a:t>새로 한 것</a:t>
@@ -5945,30 +6151,30 @@
                   <a:tcPr anchor="ctr" marL="73152" marR="73152">
                     <a:lnL w="9525" cap="flat" cmpd="sng" algn="ctr">
                       <a:solidFill>
-                        <a:srgbClr val="D1FAF7"/>
+                        <a:srgbClr val="D1FAE2"/>
                       </a:solidFill>
                       <a:prstDash val="solid"/>
                     </a:lnL>
                     <a:lnR w="9525" cap="flat" cmpd="sng" algn="ctr">
                       <a:solidFill>
-                        <a:srgbClr val="D1FAF7"/>
+                        <a:srgbClr val="D1FAE2"/>
                       </a:solidFill>
                       <a:prstDash val="solid"/>
                     </a:lnR>
                     <a:lnT w="9525" cap="flat" cmpd="sng" algn="ctr">
                       <a:solidFill>
-                        <a:srgbClr val="D1FAF7"/>
+                        <a:srgbClr val="D1FAE2"/>
                       </a:solidFill>
                       <a:prstDash val="solid"/>
                     </a:lnT>
                     <a:lnB w="9525" cap="flat" cmpd="sng" algn="ctr">
                       <a:solidFill>
-                        <a:srgbClr val="D1FAF7"/>
+                        <a:srgbClr val="D1FAE2"/>
                       </a:solidFill>
                       <a:prstDash val="solid"/>
                     </a:lnB>
                     <a:solidFill>
-                      <a:srgbClr val="D1FAF7"/>
+                      <a:srgbClr val="D1FAE2"/>
                     </a:solidFill>
                   </a:tcPr>
                 </a:tc>
@@ -5981,7 +6187,7 @@
                       <a:r>
                         <a:rPr sz="1600" b="0">
                           <a:solidFill>
-                            <a:srgbClr val="2B2B2B"/>
+                            <a:srgbClr val="26231F"/>
                           </a:solidFill>
                         </a:rPr>
                         <a:t/>
@@ -5991,25 +6197,25 @@
                   <a:tcPr anchor="ctr" marL="73152" marR="73152">
                     <a:lnL w="9525" cap="flat" cmpd="sng" algn="ctr">
                       <a:solidFill>
-                        <a:srgbClr val="D1FAF7"/>
+                        <a:srgbClr val="D1FAE2"/>
                       </a:solidFill>
                       <a:prstDash val="solid"/>
                     </a:lnL>
                     <a:lnR w="9525" cap="flat" cmpd="sng" algn="ctr">
                       <a:solidFill>
-                        <a:srgbClr val="D1FAF7"/>
+                        <a:srgbClr val="D1FAE2"/>
                       </a:solidFill>
                       <a:prstDash val="solid"/>
                     </a:lnR>
                     <a:lnT w="9525" cap="flat" cmpd="sng" algn="ctr">
                       <a:solidFill>
-                        <a:srgbClr val="D1FAF7"/>
+                        <a:srgbClr val="D1FAE2"/>
                       </a:solidFill>
                       <a:prstDash val="solid"/>
                     </a:lnT>
                     <a:lnB w="9525" cap="flat" cmpd="sng" algn="ctr">
                       <a:solidFill>
-                        <a:srgbClr val="D1FAF7"/>
+                        <a:srgbClr val="D1FAE2"/>
                       </a:solidFill>
                       <a:prstDash val="solid"/>
                     </a:lnB>
@@ -6027,7 +6233,7 @@
                       <a:r>
                         <a:rPr sz="1600" b="0">
                           <a:solidFill>
-                            <a:srgbClr val="2B2B2B"/>
+                            <a:srgbClr val="26231F"/>
                           </a:solidFill>
                         </a:rPr>
                         <a:t/>
@@ -6037,25 +6243,25 @@
                   <a:tcPr anchor="ctr" marL="73152" marR="73152">
                     <a:lnL w="9525" cap="flat" cmpd="sng" algn="ctr">
                       <a:solidFill>
-                        <a:srgbClr val="D1FAF7"/>
+                        <a:srgbClr val="D1FAE2"/>
                       </a:solidFill>
                       <a:prstDash val="solid"/>
                     </a:lnL>
                     <a:lnR w="9525" cap="flat" cmpd="sng" algn="ctr">
                       <a:solidFill>
-                        <a:srgbClr val="D1FAF7"/>
+                        <a:srgbClr val="D1FAE2"/>
                       </a:solidFill>
                       <a:prstDash val="solid"/>
                     </a:lnR>
                     <a:lnT w="9525" cap="flat" cmpd="sng" algn="ctr">
                       <a:solidFill>
-                        <a:srgbClr val="D1FAF7"/>
+                        <a:srgbClr val="D1FAE2"/>
                       </a:solidFill>
                       <a:prstDash val="solid"/>
                     </a:lnT>
                     <a:lnB w="9525" cap="flat" cmpd="sng" algn="ctr">
                       <a:solidFill>
-                        <a:srgbClr val="D1FAF7"/>
+                        <a:srgbClr val="D1FAE2"/>
                       </a:solidFill>
                       <a:prstDash val="solid"/>
                     </a:lnB>
@@ -6073,7 +6279,7 @@
                       <a:r>
                         <a:rPr sz="1600" b="0">
                           <a:solidFill>
-                            <a:srgbClr val="2B2B2B"/>
+                            <a:srgbClr val="26231F"/>
                           </a:solidFill>
                         </a:rPr>
                         <a:t/>
@@ -6083,25 +6289,25 @@
                   <a:tcPr anchor="ctr" marL="73152" marR="73152">
                     <a:lnL w="9525" cap="flat" cmpd="sng" algn="ctr">
                       <a:solidFill>
-                        <a:srgbClr val="D1FAF7"/>
+                        <a:srgbClr val="D1FAE2"/>
                       </a:solidFill>
                       <a:prstDash val="solid"/>
                     </a:lnL>
                     <a:lnR w="9525" cap="flat" cmpd="sng" algn="ctr">
                       <a:solidFill>
-                        <a:srgbClr val="D1FAF7"/>
+                        <a:srgbClr val="D1FAE2"/>
                       </a:solidFill>
                       <a:prstDash val="solid"/>
                     </a:lnR>
                     <a:lnT w="9525" cap="flat" cmpd="sng" algn="ctr">
                       <a:solidFill>
-                        <a:srgbClr val="D1FAF7"/>
+                        <a:srgbClr val="D1FAE2"/>
                       </a:solidFill>
                       <a:prstDash val="solid"/>
                     </a:lnT>
                     <a:lnB w="9525" cap="flat" cmpd="sng" algn="ctr">
                       <a:solidFill>
-                        <a:srgbClr val="D1FAF7"/>
+                        <a:srgbClr val="D1FAE2"/>
                       </a:solidFill>
                       <a:prstDash val="solid"/>
                     </a:lnB>
@@ -6119,7 +6325,7 @@
                       <a:r>
                         <a:rPr sz="1600" b="0">
                           <a:solidFill>
-                            <a:srgbClr val="2B2B2B"/>
+                            <a:srgbClr val="26231F"/>
                           </a:solidFill>
                         </a:rPr>
                         <a:t/>
@@ -6129,25 +6335,25 @@
                   <a:tcPr anchor="ctr" marL="73152" marR="73152">
                     <a:lnL w="9525" cap="flat" cmpd="sng" algn="ctr">
                       <a:solidFill>
-                        <a:srgbClr val="D1FAF7"/>
+                        <a:srgbClr val="D1FAE2"/>
                       </a:solidFill>
                       <a:prstDash val="solid"/>
                     </a:lnL>
                     <a:lnR w="9525" cap="flat" cmpd="sng" algn="ctr">
                       <a:solidFill>
-                        <a:srgbClr val="D1FAF7"/>
+                        <a:srgbClr val="D1FAE2"/>
                       </a:solidFill>
                       <a:prstDash val="solid"/>
                     </a:lnR>
                     <a:lnT w="9525" cap="flat" cmpd="sng" algn="ctr">
                       <a:solidFill>
-                        <a:srgbClr val="D1FAF7"/>
+                        <a:srgbClr val="D1FAE2"/>
                       </a:solidFill>
                       <a:prstDash val="solid"/>
                     </a:lnT>
                     <a:lnB w="9525" cap="flat" cmpd="sng" algn="ctr">
                       <a:solidFill>
-                        <a:srgbClr val="D1FAF7"/>
+                        <a:srgbClr val="D1FAE2"/>
                       </a:solidFill>
                       <a:prstDash val="solid"/>
                     </a:lnB>
@@ -6175,7 +6381,7 @@
     <p:bg>
       <p:bgPr>
         <a:solidFill>
-          <a:srgbClr val="EEFCFB"/>
+          <a:srgbClr val="EAFDF2"/>
         </a:solidFill>
         <a:effectLst/>
       </p:bgPr>
@@ -6195,46 +6401,84 @@
         </p:nvSpPr>
         <p:spPr>
           <a:xfrm>
-            <a:off x="256032" y="256032"/>
-            <a:ext cx="11679631" cy="6345936"/>
+            <a:off x="10180015" y="-1645920"/>
+            <a:ext cx="3474720" cy="3474720"/>
+          </a:xfrm>
+          <a:prstGeom prst="ellipse">
+            <a:avLst/>
+          </a:prstGeom>
+          <a:solidFill>
+            <a:srgbClr val="A5F3C5"/>
+          </a:solidFill>
+          <a:ln>
+            <a:noFill/>
+          </a:ln>
+        </p:spPr>
+        <p:txBody>
+          <a:bodyPr rtlCol="0" anchor="ctr"/>
+          <a:lstStyle/>
+          <a:p>
+            <a:pPr algn="ctr"/>
+          </a:p>
+        </p:txBody>
+      </p:sp>
+      <p:sp>
+        <p:nvSpPr>
+          <p:cNvPr id="4" name="상단 라벨"/>
+          <p:cNvSpPr txBox="1"/>
+          <p:nvPr/>
+        </p:nvSpPr>
+        <p:spPr>
+          <a:xfrm>
+            <a:off x="640080" y="274320"/>
+            <a:ext cx="5486400" cy="274320"/>
           </a:xfrm>
           <a:prstGeom prst="rect">
             <a:avLst/>
           </a:prstGeom>
           <a:noFill/>
-          <a:ln w="28575">
-            <a:solidFill>
-              <a:srgbClr val="26C5B8"/>
-            </a:solidFill>
-          </a:ln>
-        </p:spPr>
-        <p:txBody>
-          <a:bodyPr rtlCol="0" anchor="ctr"/>
-          <a:lstStyle/>
-          <a:p>
-            <a:pPr algn="ctr"/>
-          </a:p>
-        </p:txBody>
-      </p:sp>
-      <p:sp>
-        <p:nvSpPr>
-          <p:cNvPr id="4" name="장식"/>
+        </p:spPr>
+        <p:txBody>
+          <a:bodyPr wrap="square" lIns="54864" rIns="54864" tIns="27432" bIns="27432" anchor="ctr">
+            <a:noAutofit/>
+          </a:bodyPr>
+          <a:lstStyle/>
+          <a:p>
+            <a:pPr algn="l">
+              <a:lnSpc>
+                <a:spcPct val="115000"/>
+              </a:lnSpc>
+            </a:pPr>
+            <a:r>
+              <a:rPr sz="900" b="1" i="0" spc="250">
+                <a:solidFill>
+                  <a:srgbClr val="26231F"/>
+                </a:solidFill>
+              </a:rPr>
+              <a:t>FIRST BIRTHDAY</a:t>
+            </a:r>
+          </a:p>
+        </p:txBody>
+      </p:sp>
+      <p:sp>
+        <p:nvSpPr>
+          <p:cNvPr id="5" name="포인트"/>
           <p:cNvSpPr/>
           <p:nvPr/>
         </p:nvSpPr>
         <p:spPr>
-          <a:xfrm>
-            <a:off x="384048" y="384048"/>
-            <a:ext cx="11423599" cy="6089904"/>
-          </a:xfrm>
-          <a:prstGeom prst="rect">
+          <a:xfrm rot="18900000">
+            <a:off x="11048695" y="502919"/>
+            <a:ext cx="274320" cy="274320"/>
+          </a:xfrm>
+          <a:prstGeom prst="teardrop">
             <a:avLst/>
           </a:prstGeom>
-          <a:noFill/>
-          <a:ln w="9525">
-            <a:solidFill>
-              <a:srgbClr val="D1FAF7"/>
-            </a:solidFill>
+          <a:solidFill>
+            <a:srgbClr val="FFFFFF"/>
+          </a:solidFill>
+          <a:ln>
+            <a:noFill/>
           </a:ln>
         </p:spPr>
         <p:txBody>
@@ -6257,8 +6501,8 @@
         </p:nvSpPr>
         <p:spPr>
           <a:xfrm>
-            <a:off x="822960" y="548640"/>
-            <a:ext cx="9265615" cy="822960"/>
+            <a:off x="640080" y="658368"/>
+            <a:ext cx="9082735" cy="868680"/>
           </a:xfrm>
         </p:spPr>
         <p:txBody>
@@ -6275,7 +6519,7 @@
             <a:r>
               <a:rPr sz="3000" b="1" i="0">
                 <a:solidFill>
-                  <a:srgbClr val="115F59"/>
+                  <a:srgbClr val="26231F"/>
                 </a:solidFill>
               </a:rPr>
               <a:t>사진 모음</a:t>
@@ -6285,14 +6529,14 @@
       </p:sp>
       <p:sp>
         <p:nvSpPr>
-          <p:cNvPr id="5" name="사진 자리"/>
+          <p:cNvPr id="6" name="사진 자리"/>
           <p:cNvSpPr/>
           <p:nvPr/>
         </p:nvSpPr>
         <p:spPr>
           <a:xfrm>
-            <a:off x="822960" y="1554480"/>
-            <a:ext cx="2499283" cy="2217420"/>
+            <a:off x="640080" y="1783080"/>
+            <a:ext cx="2590723" cy="2194560"/>
           </a:xfrm>
           <a:prstGeom prst="roundRect">
             <a:avLst>
@@ -6300,12 +6544,10 @@
             </a:avLst>
           </a:prstGeom>
           <a:solidFill>
-            <a:srgbClr val="D1FAF7"/>
+            <a:srgbClr val="D1FAE2"/>
           </a:solidFill>
           <a:ln w="19050">
-            <a:solidFill>
-              <a:srgbClr val="26C5B8"/>
-            </a:solidFill>
+            <a:noFill/>
             <a:prstDash val="dash"/>
           </a:ln>
         </p:spPr>
@@ -6323,7 +6565,7 @@
             <a:r>
               <a:rPr sz="1200" b="0" i="0">
                 <a:solidFill>
-                  <a:srgbClr val="115F59"/>
+                  <a:srgbClr val="8E8780"/>
                 </a:solidFill>
               </a:rPr>
               <a:t>사진 1</a:t>
@@ -6333,14 +6575,14 @@
       </p:sp>
       <p:sp>
         <p:nvSpPr>
-          <p:cNvPr id="6" name="사진 자리"/>
+          <p:cNvPr id="7" name="사진 자리"/>
           <p:cNvSpPr/>
           <p:nvPr/>
         </p:nvSpPr>
         <p:spPr>
           <a:xfrm>
-            <a:off x="3505123" y="1554480"/>
-            <a:ext cx="2499283" cy="2217420"/>
+            <a:off x="3413683" y="1783080"/>
+            <a:ext cx="2590723" cy="2194560"/>
           </a:xfrm>
           <a:prstGeom prst="roundRect">
             <a:avLst>
@@ -6348,12 +6590,10 @@
             </a:avLst>
           </a:prstGeom>
           <a:solidFill>
-            <a:srgbClr val="D1FAF7"/>
+            <a:srgbClr val="D1FAE2"/>
           </a:solidFill>
           <a:ln w="19050">
-            <a:solidFill>
-              <a:srgbClr val="26C5B8"/>
-            </a:solidFill>
+            <a:noFill/>
             <a:prstDash val="dash"/>
           </a:ln>
         </p:spPr>
@@ -6371,7 +6611,7 @@
             <a:r>
               <a:rPr sz="1200" b="0" i="0">
                 <a:solidFill>
-                  <a:srgbClr val="115F59"/>
+                  <a:srgbClr val="8E8780"/>
                 </a:solidFill>
               </a:rPr>
               <a:t>사진 2</a:t>
@@ -6381,14 +6621,14 @@
       </p:sp>
       <p:sp>
         <p:nvSpPr>
-          <p:cNvPr id="7" name="사진 자리"/>
+          <p:cNvPr id="8" name="사진 자리"/>
           <p:cNvSpPr/>
           <p:nvPr/>
         </p:nvSpPr>
         <p:spPr>
           <a:xfrm>
-            <a:off x="6187287" y="1554480"/>
-            <a:ext cx="2499283" cy="2217420"/>
+            <a:off x="6187287" y="1783080"/>
+            <a:ext cx="2590723" cy="2194560"/>
           </a:xfrm>
           <a:prstGeom prst="roundRect">
             <a:avLst>
@@ -6396,12 +6636,10 @@
             </a:avLst>
           </a:prstGeom>
           <a:solidFill>
-            <a:srgbClr val="D1FAF7"/>
+            <a:srgbClr val="D1FAE2"/>
           </a:solidFill>
           <a:ln w="19050">
-            <a:solidFill>
-              <a:srgbClr val="26C5B8"/>
-            </a:solidFill>
+            <a:noFill/>
             <a:prstDash val="dash"/>
           </a:ln>
         </p:spPr>
@@ -6419,7 +6657,7 @@
             <a:r>
               <a:rPr sz="1200" b="0" i="0">
                 <a:solidFill>
-                  <a:srgbClr val="115F59"/>
+                  <a:srgbClr val="8E8780"/>
                 </a:solidFill>
               </a:rPr>
               <a:t>사진 3</a:t>
@@ -6429,14 +6667,14 @@
       </p:sp>
       <p:sp>
         <p:nvSpPr>
-          <p:cNvPr id="8" name="사진 자리"/>
+          <p:cNvPr id="9" name="사진 자리"/>
           <p:cNvSpPr/>
           <p:nvPr/>
         </p:nvSpPr>
         <p:spPr>
           <a:xfrm>
-            <a:off x="8869451" y="1554480"/>
-            <a:ext cx="2499283" cy="2217420"/>
+            <a:off x="8960891" y="1783080"/>
+            <a:ext cx="2590723" cy="2194560"/>
           </a:xfrm>
           <a:prstGeom prst="roundRect">
             <a:avLst>
@@ -6444,12 +6682,10 @@
             </a:avLst>
           </a:prstGeom>
           <a:solidFill>
-            <a:srgbClr val="D1FAF7"/>
+            <a:srgbClr val="D1FAE2"/>
           </a:solidFill>
           <a:ln w="19050">
-            <a:solidFill>
-              <a:srgbClr val="26C5B8"/>
-            </a:solidFill>
+            <a:noFill/>
             <a:prstDash val="dash"/>
           </a:ln>
         </p:spPr>
@@ -6467,7 +6703,7 @@
             <a:r>
               <a:rPr sz="1200" b="0" i="0">
                 <a:solidFill>
-                  <a:srgbClr val="115F59"/>
+                  <a:srgbClr val="8E8780"/>
                 </a:solidFill>
               </a:rPr>
               <a:t>사진 4</a:t>
@@ -6477,14 +6713,14 @@
       </p:sp>
       <p:sp>
         <p:nvSpPr>
-          <p:cNvPr id="9" name="사진 자리"/>
+          <p:cNvPr id="10" name="사진 자리"/>
           <p:cNvSpPr/>
           <p:nvPr/>
         </p:nvSpPr>
         <p:spPr>
           <a:xfrm>
-            <a:off x="822960" y="3954780"/>
-            <a:ext cx="2499283" cy="2217420"/>
+            <a:off x="640080" y="4160520"/>
+            <a:ext cx="2590723" cy="2194560"/>
           </a:xfrm>
           <a:prstGeom prst="roundRect">
             <a:avLst>
@@ -6492,12 +6728,10 @@
             </a:avLst>
           </a:prstGeom>
           <a:solidFill>
-            <a:srgbClr val="D1FAF7"/>
+            <a:srgbClr val="D1FAE2"/>
           </a:solidFill>
           <a:ln w="19050">
-            <a:solidFill>
-              <a:srgbClr val="26C5B8"/>
-            </a:solidFill>
+            <a:noFill/>
             <a:prstDash val="dash"/>
           </a:ln>
         </p:spPr>
@@ -6515,7 +6749,7 @@
             <a:r>
               <a:rPr sz="1200" b="0" i="0">
                 <a:solidFill>
-                  <a:srgbClr val="115F59"/>
+                  <a:srgbClr val="8E8780"/>
                 </a:solidFill>
               </a:rPr>
               <a:t>사진 5</a:t>
@@ -6525,14 +6759,14 @@
       </p:sp>
       <p:sp>
         <p:nvSpPr>
-          <p:cNvPr id="10" name="사진 자리"/>
+          <p:cNvPr id="11" name="사진 자리"/>
           <p:cNvSpPr/>
           <p:nvPr/>
         </p:nvSpPr>
         <p:spPr>
           <a:xfrm>
-            <a:off x="3505123" y="3954780"/>
-            <a:ext cx="2499283" cy="2217420"/>
+            <a:off x="3413683" y="4160520"/>
+            <a:ext cx="2590723" cy="2194560"/>
           </a:xfrm>
           <a:prstGeom prst="roundRect">
             <a:avLst>
@@ -6540,12 +6774,10 @@
             </a:avLst>
           </a:prstGeom>
           <a:solidFill>
-            <a:srgbClr val="D1FAF7"/>
+            <a:srgbClr val="D1FAE2"/>
           </a:solidFill>
           <a:ln w="19050">
-            <a:solidFill>
-              <a:srgbClr val="26C5B8"/>
-            </a:solidFill>
+            <a:noFill/>
             <a:prstDash val="dash"/>
           </a:ln>
         </p:spPr>
@@ -6563,7 +6795,7 @@
             <a:r>
               <a:rPr sz="1200" b="0" i="0">
                 <a:solidFill>
-                  <a:srgbClr val="115F59"/>
+                  <a:srgbClr val="8E8780"/>
                 </a:solidFill>
               </a:rPr>
               <a:t>사진 6</a:t>
@@ -6573,14 +6805,14 @@
       </p:sp>
       <p:sp>
         <p:nvSpPr>
-          <p:cNvPr id="11" name="사진 자리"/>
+          <p:cNvPr id="12" name="사진 자리"/>
           <p:cNvSpPr/>
           <p:nvPr/>
         </p:nvSpPr>
         <p:spPr>
           <a:xfrm>
-            <a:off x="6187287" y="3954780"/>
-            <a:ext cx="2499283" cy="2217420"/>
+            <a:off x="6187287" y="4160520"/>
+            <a:ext cx="2590723" cy="2194560"/>
           </a:xfrm>
           <a:prstGeom prst="roundRect">
             <a:avLst>
@@ -6588,12 +6820,10 @@
             </a:avLst>
           </a:prstGeom>
           <a:solidFill>
-            <a:srgbClr val="D1FAF7"/>
+            <a:srgbClr val="D1FAE2"/>
           </a:solidFill>
           <a:ln w="19050">
-            <a:solidFill>
-              <a:srgbClr val="26C5B8"/>
-            </a:solidFill>
+            <a:noFill/>
             <a:prstDash val="dash"/>
           </a:ln>
         </p:spPr>
@@ -6611,7 +6841,7 @@
             <a:r>
               <a:rPr sz="1200" b="0" i="0">
                 <a:solidFill>
-                  <a:srgbClr val="115F59"/>
+                  <a:srgbClr val="8E8780"/>
                 </a:solidFill>
               </a:rPr>
               <a:t>사진 7</a:t>
@@ -6621,14 +6851,14 @@
       </p:sp>
       <p:sp>
         <p:nvSpPr>
-          <p:cNvPr id="12" name="사진 자리"/>
+          <p:cNvPr id="13" name="사진 자리"/>
           <p:cNvSpPr/>
           <p:nvPr/>
         </p:nvSpPr>
         <p:spPr>
           <a:xfrm>
-            <a:off x="8869451" y="3954780"/>
-            <a:ext cx="2499283" cy="2217420"/>
+            <a:off x="8960891" y="4160520"/>
+            <a:ext cx="2590723" cy="2194560"/>
           </a:xfrm>
           <a:prstGeom prst="roundRect">
             <a:avLst>
@@ -6636,12 +6866,10 @@
             </a:avLst>
           </a:prstGeom>
           <a:solidFill>
-            <a:srgbClr val="D1FAF7"/>
+            <a:srgbClr val="D1FAE2"/>
           </a:solidFill>
           <a:ln w="19050">
-            <a:solidFill>
-              <a:srgbClr val="26C5B8"/>
-            </a:solidFill>
+            <a:noFill/>
             <a:prstDash val="dash"/>
           </a:ln>
         </p:spPr>
@@ -6659,7 +6887,7 @@
             <a:r>
               <a:rPr sz="1200" b="0" i="0">
                 <a:solidFill>
-                  <a:srgbClr val="115F59"/>
+                  <a:srgbClr val="8E8780"/>
                 </a:solidFill>
               </a:rPr>
               <a:t>사진 8</a:t>
@@ -6678,6 +6906,14 @@
 <file path=ppt/slides/slide6.xml><?xml version="1.0" encoding="utf-8"?>
 <p:sld xmlns:a="http://schemas.openxmlformats.org/drawingml/2006/main" xmlns:p="http://schemas.openxmlformats.org/presentationml/2006/main" xmlns:r="http://schemas.openxmlformats.org/officeDocument/2006/relationships">
   <p:cSld>
+    <p:bg>
+      <p:bgPr>
+        <a:solidFill>
+          <a:srgbClr val="EAFDF2"/>
+        </a:solidFill>
+        <a:effectLst/>
+      </p:bgPr>
+    </p:bg>
     <p:spTree>
       <p:nvGrpSpPr>
         <p:cNvPr id="1" name=""/>
@@ -6685,30 +6921,116 @@
         <p:nvPr/>
       </p:nvGrpSpPr>
       <p:grpSpPr/>
-      <p:pic>
-        <p:nvPicPr>
-          <p:cNvPr id="3" name="표지 그림" descr="birthday-16.jpg"/>
-          <p:cNvPicPr>
-            <a:picLocks noChangeAspect="1"/>
-          </p:cNvPicPr>
+      <p:sp>
+        <p:nvSpPr>
+          <p:cNvPr id="3" name="사진 자리"/>
+          <p:cNvSpPr/>
           <p:nvPr/>
-        </p:nvPicPr>
-        <p:blipFill>
-          <a:blip r:embed="rId2"/>
-          <a:stretch>
-            <a:fillRect/>
-          </a:stretch>
-        </p:blipFill>
-        <p:spPr>
-          <a:xfrm>
-            <a:off x="0" y="0"/>
-            <a:ext cx="12191695" cy="6858000"/>
+        </p:nvSpPr>
+        <p:spPr>
+          <a:xfrm>
+            <a:off x="7802684" y="0"/>
+            <a:ext cx="4389010" cy="6858000"/>
           </a:xfrm>
           <a:prstGeom prst="rect">
             <a:avLst/>
           </a:prstGeom>
-        </p:spPr>
-      </p:pic>
+          <a:solidFill>
+            <a:srgbClr val="A5F3C5"/>
+          </a:solidFill>
+          <a:ln>
+            <a:noFill/>
+          </a:ln>
+        </p:spPr>
+        <p:txBody>
+          <a:bodyPr rtlCol="0" anchor="ctr" wrap="square" lIns="54864" rIns="54864" tIns="27432" bIns="27432">
+            <a:noAutofit/>
+          </a:bodyPr>
+          <a:lstStyle/>
+          <a:p>
+            <a:pPr algn="ctr">
+              <a:lnSpc>
+                <a:spcPct val="100000"/>
+              </a:lnSpc>
+            </a:pPr>
+            <a:r>
+              <a:rPr sz="1400" b="0" i="0">
+                <a:solidFill>
+                  <a:srgbClr val="274935"/>
+                </a:solidFill>
+              </a:rPr>
+              <a:t>사진을 넣어 주세요</a:t>
+            </a:r>
+          </a:p>
+        </p:txBody>
+      </p:sp>
+      <p:sp>
+        <p:nvSpPr>
+          <p:cNvPr id="4" name="장식"/>
+          <p:cNvSpPr/>
+          <p:nvPr/>
+        </p:nvSpPr>
+        <p:spPr>
+          <a:xfrm>
+            <a:off x="8168435" y="365760"/>
+            <a:ext cx="3657508" cy="6126480"/>
+          </a:xfrm>
+          <a:prstGeom prst="rect">
+            <a:avLst/>
+          </a:prstGeom>
+          <a:noFill/>
+          <a:ln w="9525">
+            <a:solidFill>
+              <a:srgbClr val="26231F"/>
+            </a:solidFill>
+          </a:ln>
+        </p:spPr>
+        <p:txBody>
+          <a:bodyPr rtlCol="0" anchor="ctr"/>
+          <a:lstStyle/>
+          <a:p>
+            <a:pPr algn="ctr"/>
+          </a:p>
+        </p:txBody>
+      </p:sp>
+      <p:sp>
+        <p:nvSpPr>
+          <p:cNvPr id="5" name="라벨"/>
+          <p:cNvSpPr txBox="1"/>
+          <p:nvPr/>
+        </p:nvSpPr>
+        <p:spPr>
+          <a:xfrm>
+            <a:off x="822960" y="2148840"/>
+            <a:ext cx="5608179" cy="274320"/>
+          </a:xfrm>
+          <a:prstGeom prst="rect">
+            <a:avLst/>
+          </a:prstGeom>
+          <a:noFill/>
+        </p:spPr>
+        <p:txBody>
+          <a:bodyPr wrap="square" lIns="54864" rIns="54864" tIns="27432" bIns="27432" anchor="t">
+            <a:noAutofit/>
+          </a:bodyPr>
+          <a:lstStyle/>
+          <a:p>
+            <a:pPr algn="l">
+              <a:lnSpc>
+                <a:spcPct val="115000"/>
+              </a:lnSpc>
+            </a:pPr>
+            <a:r>
+              <a:rPr sz="1000" b="1" i="0" spc="250">
+                <a:solidFill>
+                  <a:srgbClr val="26231F"/>
+                </a:solidFill>
+              </a:rPr>
+              <a:t>FIRST BIRTHDAY</a:t>
+            </a:r>
+          </a:p>
+        </p:txBody>
+      </p:sp>
       <p:sp>
         <p:nvSpPr>
           <p:cNvPr id="2" name="Title 1"/>
@@ -6721,8 +7043,8 @@
         </p:nvSpPr>
         <p:spPr>
           <a:xfrm>
-            <a:off x="853418" y="2057400"/>
-            <a:ext cx="6095847" cy="1554480"/>
+            <a:off x="822960" y="2606040"/>
+            <a:ext cx="5608179" cy="1188720"/>
           </a:xfrm>
         </p:spPr>
         <p:txBody>
@@ -6739,7 +7061,7 @@
             <a:r>
               <a:rPr sz="3400" b="1" i="0">
                 <a:solidFill>
-                  <a:srgbClr val="115F59"/>
+                  <a:srgbClr val="26231F"/>
                 </a:solidFill>
               </a:rPr>
               <a:t>와 주셔서 고맙습니다</a:t>
@@ -6749,14 +7071,14 @@
       </p:sp>
       <p:sp>
         <p:nvSpPr>
-          <p:cNvPr id="4" name="한 줄 문구"/>
+          <p:cNvPr id="6" name="한 줄 문구"/>
           <p:cNvSpPr txBox="1"/>
           <p:nvPr/>
         </p:nvSpPr>
         <p:spPr>
           <a:xfrm>
-            <a:off x="853418" y="3749039"/>
-            <a:ext cx="6095847" cy="822960"/>
+            <a:off x="822960" y="3886200"/>
+            <a:ext cx="5608179" cy="822960"/>
           </a:xfrm>
           <a:prstGeom prst="rect">
             <a:avLst/>
@@ -6775,9 +7097,9 @@
               </a:lnSpc>
             </a:pPr>
             <a:r>
-              <a:rPr sz="1700" b="0" i="1">
+              <a:rPr sz="1700" b="0" i="0">
                 <a:solidFill>
-                  <a:srgbClr val="115F59"/>
+                  <a:srgbClr val="26231F"/>
                 </a:solidFill>
               </a:rPr>
               <a:t>아이가 한 살이 되었습니다</a:t>
@@ -6787,14 +7109,14 @@
       </p:sp>
       <p:sp>
         <p:nvSpPr>
-          <p:cNvPr id="5" name="안내 문구"/>
+          <p:cNvPr id="7" name="안내 문구"/>
           <p:cNvSpPr txBox="1"/>
           <p:nvPr/>
         </p:nvSpPr>
         <p:spPr>
           <a:xfrm>
-            <a:off x="853418" y="4617720"/>
-            <a:ext cx="6095847" cy="914400"/>
+            <a:off x="822960" y="4754880"/>
+            <a:ext cx="5608179" cy="914400"/>
           </a:xfrm>
           <a:prstGeom prst="rect">
             <a:avLst/>
@@ -6815,7 +7137,7 @@
             <a:r>
               <a:rPr sz="1400" b="0" i="0">
                 <a:solidFill>
-                  <a:srgbClr val="666666"/>
+                  <a:srgbClr val="26231F"/>
                 </a:solidFill>
               </a:rPr>
               <a:t>아기 이름 · 부모 이름</a:t>
@@ -6842,34 +7164,34 @@
         <a:sysClr val="window" lastClr="FFFFFF"/>
       </a:lt1>
       <a:dk2>
-        <a:srgbClr val="115F59"/>
+        <a:srgbClr val="274935"/>
       </a:dk2>
       <a:lt2>
-        <a:srgbClr val="EEFCFB"/>
+        <a:srgbClr val="EAFDF2"/>
       </a:lt2>
       <a:accent1>
-        <a:srgbClr val="26C5B8"/>
+        <a:srgbClr val="7BEAA9"/>
       </a:accent1>
       <a:accent2>
-        <a:srgbClr val="209DB6"/>
+        <a:srgbClr val="9FEFE6"/>
       </a:accent2>
       <a:accent3>
-        <a:srgbClr val="115F59"/>
+        <a:srgbClr val="274935"/>
       </a:accent3>
       <a:accent4>
-        <a:srgbClr val="D1FAF7"/>
+        <a:srgbClr val="D1FAE2"/>
       </a:accent4>
       <a:accent5>
-        <a:srgbClr val="23B1B7"/>
+        <a:srgbClr val="8DECC8"/>
       </a:accent5>
       <a:accent6>
-        <a:srgbClr val="709F9B"/>
+        <a:srgbClr val="7D9286"/>
       </a:accent6>
       <a:hlink>
-        <a:srgbClr val="26C5B8"/>
+        <a:srgbClr val="7BEAA9"/>
       </a:hlink>
       <a:folHlink>
-        <a:srgbClr val="115F59"/>
+        <a:srgbClr val="274935"/>
       </a:folHlink>
     </a:clrScheme>
     <a:fontScheme name="Office">
